--- a/data/outputs/v2/Physics/SS1.1_Pressure/quiz/Physics_G10_SS1.1_Pressure_L2_QuickCheck.pptx
+++ b/data/outputs/v2/Physics/SS1.1_Pressure/quiz/Physics_G10_SS1.1_Pressure_L2_QuickCheck.pptx
@@ -15,11 +15,9 @@
     <p:sldId id="263" r:id="rId9"/>
     <p:sldId id="264" r:id="rId10"/>
     <p:sldId id="265" r:id="rId11"/>
-    <p:sldId id="266" r:id="rId12"/>
-    <p:sldId id="267" r:id="rId13"/>
   </p:sldIdLst>
   <p:notesMasterIdLst>
-    <p:notesMasterId r:id="rId14"/>
+    <p:notesMasterId r:id="rId12"/>
   </p:notesMasterIdLst>
   <p:sldSz cx="12192000" cy="6858000"/>
   <p:notesSz cx="6858000" cy="12192000"/>
@@ -625,182 +623,6 @@
             <a:fld id="{F7021451-1387-4CA6-816F-3879F97B5CBC}" type="slidenum">
               <a:rPr lang="en-US"/>
               <a:t>10</a:t>
-            </a:fld>
-            <a:endParaRPr lang="en-US"/>
-          </a:p>
-        </p:txBody>
-      </p:sp>
-    </p:spTree>
-    <p:extLst>
-      <p:ext uri="{BB962C8B-B14F-4D97-AF65-F5344CB8AC3E}">
-        <p14:creationId xmlns:p14="http://schemas.microsoft.com/office/powerpoint/2010/main" val="1024086991"/>
-      </p:ext>
-    </p:extLst>
-  </p:cSld>
-  <p:clrMapOvr>
-    <a:masterClrMapping/>
-  </p:clrMapOvr>
-</p:notes>
-</file>
-
-<file path=ppt/notesSlides/notesSlide11.xml><?xml version="1.0" encoding="utf-8"?>
-<p:notes xmlns:a="http://schemas.openxmlformats.org/drawingml/2006/main" xmlns:r="http://schemas.openxmlformats.org/officeDocument/2006/relationships" xmlns:p="http://schemas.openxmlformats.org/presentationml/2006/main">
-  <p:cSld>
-    <p:spTree>
-      <p:nvGrpSpPr>
-        <p:cNvPr id="1" name=""/>
-        <p:cNvGrpSpPr/>
-        <p:nvPr/>
-      </p:nvGrpSpPr>
-      <p:grpSpPr>
-        <a:xfrm>
-          <a:off x="0" y="0"/>
-          <a:ext cx="0" cy="0"/>
-          <a:chOff x="0" y="0"/>
-          <a:chExt cx="0" cy="0"/>
-        </a:xfrm>
-      </p:grpSpPr>
-      <p:sp>
-        <p:nvSpPr>
-          <p:cNvPr id="2" name="Slide Image Placeholder 1"/>
-          <p:cNvSpPr>
-            <a:spLocks noGrp="1" noRot="1" noChangeAspect="1"/>
-          </p:cNvSpPr>
-          <p:nvPr>
-            <p:ph type="sldImg"/>
-          </p:nvPr>
-        </p:nvSpPr>
-        <p:spPr/>
-      </p:sp>
-      <p:sp>
-        <p:nvSpPr>
-          <p:cNvPr id="3" name="Notes Placeholder 2"/>
-          <p:cNvSpPr>
-            <a:spLocks noGrp="1"/>
-          </p:cNvSpPr>
-          <p:nvPr>
-            <p:ph type="body" idx="1"/>
-          </p:nvPr>
-        </p:nvSpPr>
-        <p:spPr/>
-        <p:txBody>
-          <a:bodyPr/>
-          <a:lstStyle/>
-          <a:p>
-            <a:r>
-              <a:rPr lang="en-US" dirty="0"/>
-              <a:t/>
-            </a:r>
-            <a:endParaRPr lang="en-US" dirty="0"/>
-          </a:p>
-        </p:txBody>
-      </p:sp>
-      <p:sp>
-        <p:nvSpPr>
-          <p:cNvPr id="4" name="Slide Number Placeholder 3"/>
-          <p:cNvSpPr>
-            <a:spLocks noGrp="1"/>
-          </p:cNvSpPr>
-          <p:nvPr>
-            <p:ph type="sldNum" sz="quarter" idx="10"/>
-          </p:nvPr>
-        </p:nvSpPr>
-        <p:spPr/>
-        <p:txBody>
-          <a:bodyPr/>
-          <a:lstStyle/>
-          <a:p>
-            <a:fld id="{F7021451-1387-4CA6-816F-3879F97B5CBC}" type="slidenum">
-              <a:rPr lang="en-US"/>
-              <a:t>11</a:t>
-            </a:fld>
-            <a:endParaRPr lang="en-US"/>
-          </a:p>
-        </p:txBody>
-      </p:sp>
-    </p:spTree>
-    <p:extLst>
-      <p:ext uri="{BB962C8B-B14F-4D97-AF65-F5344CB8AC3E}">
-        <p14:creationId xmlns:p14="http://schemas.microsoft.com/office/powerpoint/2010/main" val="1024086991"/>
-      </p:ext>
-    </p:extLst>
-  </p:cSld>
-  <p:clrMapOvr>
-    <a:masterClrMapping/>
-  </p:clrMapOvr>
-</p:notes>
-</file>
-
-<file path=ppt/notesSlides/notesSlide12.xml><?xml version="1.0" encoding="utf-8"?>
-<p:notes xmlns:a="http://schemas.openxmlformats.org/drawingml/2006/main" xmlns:r="http://schemas.openxmlformats.org/officeDocument/2006/relationships" xmlns:p="http://schemas.openxmlformats.org/presentationml/2006/main">
-  <p:cSld>
-    <p:spTree>
-      <p:nvGrpSpPr>
-        <p:cNvPr id="1" name=""/>
-        <p:cNvGrpSpPr/>
-        <p:nvPr/>
-      </p:nvGrpSpPr>
-      <p:grpSpPr>
-        <a:xfrm>
-          <a:off x="0" y="0"/>
-          <a:ext cx="0" cy="0"/>
-          <a:chOff x="0" y="0"/>
-          <a:chExt cx="0" cy="0"/>
-        </a:xfrm>
-      </p:grpSpPr>
-      <p:sp>
-        <p:nvSpPr>
-          <p:cNvPr id="2" name="Slide Image Placeholder 1"/>
-          <p:cNvSpPr>
-            <a:spLocks noGrp="1" noRot="1" noChangeAspect="1"/>
-          </p:cNvSpPr>
-          <p:nvPr>
-            <p:ph type="sldImg"/>
-          </p:nvPr>
-        </p:nvSpPr>
-        <p:spPr/>
-      </p:sp>
-      <p:sp>
-        <p:nvSpPr>
-          <p:cNvPr id="3" name="Notes Placeholder 2"/>
-          <p:cNvSpPr>
-            <a:spLocks noGrp="1"/>
-          </p:cNvSpPr>
-          <p:nvPr>
-            <p:ph type="body" idx="1"/>
-          </p:nvPr>
-        </p:nvSpPr>
-        <p:spPr/>
-        <p:txBody>
-          <a:bodyPr/>
-          <a:lstStyle/>
-          <a:p>
-            <a:r>
-              <a:rPr lang="en-US" dirty="0"/>
-              <a:t/>
-            </a:r>
-            <a:endParaRPr lang="en-US" dirty="0"/>
-          </a:p>
-        </p:txBody>
-      </p:sp>
-      <p:sp>
-        <p:nvSpPr>
-          <p:cNvPr id="4" name="Slide Number Placeholder 3"/>
-          <p:cNvSpPr>
-            <a:spLocks noGrp="1"/>
-          </p:cNvSpPr>
-          <p:nvPr>
-            <p:ph type="sldNum" sz="quarter" idx="10"/>
-          </p:nvPr>
-        </p:nvSpPr>
-        <p:spPr/>
-        <p:txBody>
-          <a:bodyPr/>
-          <a:lstStyle/>
-          <a:p>
-            <a:fld id="{F7021451-1387-4CA6-816F-3879F97B5CBC}" type="slidenum">
-              <a:rPr lang="en-US"/>
-              <a:t>12</a:t>
             </a:fld>
             <a:endParaRPr lang="en-US"/>
           </a:p>
@@ -2004,7 +1826,7 @@
                 <a:ea typeface="Arial" pitchFamily="34" charset="-122"/>
                 <a:cs typeface="Arial" pitchFamily="34" charset="-120"/>
               </a:rPr>
-              <a:t>10 multiple-choice questions  •  choose A, B, C or D</a:t>
+              <a:t>8 multiple-choice questions  •  choose A, B, C or D</a:t>
             </a:r>
             <a:endParaRPr lang="en-US" sz="1600" dirty="0"/>
           </a:p>
@@ -2134,1226 +1956,6 @@
 <file path=ppt/slides/slide10.xml><?xml version="1.0" encoding="utf-8"?>
 <p:sld xmlns:a="http://schemas.openxmlformats.org/drawingml/2006/main" xmlns:r="http://schemas.openxmlformats.org/officeDocument/2006/relationships" xmlns:p="http://schemas.openxmlformats.org/presentationml/2006/main">
   <p:cSld name="Slide 10">
-    <p:bg>
-      <p:bgPr>
-        <a:solidFill>
-          <a:srgbClr val="6A4C93"/>
-        </a:solidFill>
-      </p:bgPr>
-    </p:bg>
-    <p:spTree>
-      <p:nvGrpSpPr>
-        <p:cNvPr id="1" name=""/>
-        <p:cNvGrpSpPr/>
-        <p:nvPr/>
-      </p:nvGrpSpPr>
-      <p:grpSpPr>
-        <a:xfrm>
-          <a:off x="0" y="0"/>
-          <a:ext cx="0" cy="0"/>
-          <a:chOff x="0" y="0"/>
-          <a:chExt cx="0" cy="0"/>
-        </a:xfrm>
-      </p:grpSpPr>
-      <p:sp>
-        <p:nvSpPr>
-          <p:cNvPr id="2" name="Text 0"/>
-          <p:cNvSpPr/>
-          <p:nvPr/>
-        </p:nvSpPr>
-        <p:spPr>
-          <a:xfrm>
-            <a:off x="548640" y="365760"/>
-            <a:ext cx="6400800" cy="365760"/>
-          </a:xfrm>
-          <a:prstGeom prst="rect">
-            <a:avLst/>
-          </a:prstGeom>
-          <a:noFill/>
-          <a:ln/>
-        </p:spPr>
-        <p:txBody>
-          <a:bodyPr wrap="square" lIns="0" tIns="0" rIns="0" bIns="0" rtlCol="0" anchor="ctr"/>
-          <a:lstStyle/>
-          <a:p>
-            <a:pPr indent="0" marL="0">
-              <a:buNone/>
-            </a:pPr>
-            <a:r>
-              <a:rPr lang="en-US" sz="1300" b="1" spc="200" kern="0" dirty="0">
-                <a:solidFill>
-                  <a:srgbClr val="E0D6F0"/>
-                </a:solidFill>
-                <a:latin typeface="Arial" pitchFamily="34" charset="0"/>
-                <a:ea typeface="Arial" pitchFamily="34" charset="-122"/>
-                <a:cs typeface="Arial" pitchFamily="34" charset="-120"/>
-              </a:rPr>
-              <a:t>QUESTION 9 OF 10</a:t>
-            </a:r>
-            <a:endParaRPr lang="en-US" sz="1300" dirty="0"/>
-          </a:p>
-        </p:txBody>
-      </p:sp>
-      <p:sp>
-        <p:nvSpPr>
-          <p:cNvPr id="3" name="Shape 1"/>
-          <p:cNvSpPr/>
-          <p:nvPr/>
-        </p:nvSpPr>
-        <p:spPr>
-          <a:xfrm>
-            <a:off x="8138160" y="320040"/>
-            <a:ext cx="3474720" cy="365760"/>
-          </a:xfrm>
-          <a:prstGeom prst="roundRect">
-            <a:avLst>
-              <a:gd name="adj" fmla="val 15000"/>
-            </a:avLst>
-          </a:prstGeom>
-          <a:solidFill>
-            <a:srgbClr val="5A3F80"/>
-          </a:solidFill>
-          <a:ln/>
-        </p:spPr>
-      </p:sp>
-      <p:sp>
-        <p:nvSpPr>
-          <p:cNvPr id="4" name="Text 2"/>
-          <p:cNvSpPr/>
-          <p:nvPr/>
-        </p:nvSpPr>
-        <p:spPr>
-          <a:xfrm>
-            <a:off x="8138160" y="320040"/>
-            <a:ext cx="3474720" cy="365760"/>
-          </a:xfrm>
-          <a:prstGeom prst="rect">
-            <a:avLst/>
-          </a:prstGeom>
-          <a:noFill/>
-          <a:ln/>
-        </p:spPr>
-        <p:txBody>
-          <a:bodyPr wrap="square" lIns="0" tIns="0" rIns="0" bIns="0" rtlCol="0" anchor="ctr"/>
-          <a:lstStyle/>
-          <a:p>
-            <a:pPr algn="ctr" indent="0" marL="0">
-              <a:buNone/>
-            </a:pPr>
-            <a:r>
-              <a:rPr lang="en-US" sz="1100" i="1" dirty="0">
-                <a:solidFill>
-                  <a:srgbClr val="E0D6F0"/>
-                </a:solidFill>
-                <a:latin typeface="Arial" pitchFamily="34" charset="0"/>
-                <a:ea typeface="Arial" pitchFamily="34" charset="-122"/>
-                <a:cs typeface="Arial" pitchFamily="34" charset="-120"/>
-              </a:rPr>
-              <a:t>Use after: DQB phase</a:t>
-            </a:r>
-            <a:endParaRPr lang="en-US" sz="1100" dirty="0"/>
-          </a:p>
-        </p:txBody>
-      </p:sp>
-      <p:sp>
-        <p:nvSpPr>
-          <p:cNvPr id="5" name="Text 3"/>
-          <p:cNvSpPr/>
-          <p:nvPr/>
-        </p:nvSpPr>
-        <p:spPr>
-          <a:xfrm>
-            <a:off x="548640" y="868680"/>
-            <a:ext cx="11064240" cy="1325880"/>
-          </a:xfrm>
-          <a:prstGeom prst="rect">
-            <a:avLst/>
-          </a:prstGeom>
-          <a:noFill/>
-          <a:ln/>
-        </p:spPr>
-        <p:txBody>
-          <a:bodyPr wrap="square" lIns="0" tIns="0" rIns="0" bIns="0" rtlCol="0" anchor="ctr"/>
-          <a:lstStyle/>
-          <a:p>
-            <a:pPr indent="0" marL="0">
-              <a:buNone/>
-            </a:pPr>
-            <a:r>
-              <a:rPr lang="en-US" sz="2000" b="1" dirty="0">
-                <a:solidFill>
-                  <a:srgbClr val="FFFFFF"/>
-                </a:solidFill>
-                <a:latin typeface="Arial" pitchFamily="34" charset="0"/>
-                <a:ea typeface="Arial" pitchFamily="34" charset="-122"/>
-                <a:cs typeface="Arial" pitchFamily="34" charset="-120"/>
-              </a:rPr>
-              <a:t>A student must write a 'What I now THINK' card explaining why a sealed jerrycan with some air removed collapses. Which card is the best scientific explanation using force per unit area?</a:t>
-            </a:r>
-            <a:endParaRPr lang="en-US" sz="2000" dirty="0"/>
-          </a:p>
-        </p:txBody>
-      </p:sp>
-      <p:sp>
-        <p:nvSpPr>
-          <p:cNvPr id="6" name="Shape 4"/>
-          <p:cNvSpPr/>
-          <p:nvPr/>
-        </p:nvSpPr>
-        <p:spPr>
-          <a:xfrm>
-            <a:off x="731520" y="2331720"/>
-            <a:ext cx="10698480" cy="777240"/>
-          </a:xfrm>
-          <a:prstGeom prst="roundRect">
-            <a:avLst>
-              <a:gd name="adj" fmla="val 9412"/>
-            </a:avLst>
-          </a:prstGeom>
-          <a:solidFill>
-            <a:srgbClr val="7C5CAA"/>
-          </a:solidFill>
-          <a:ln/>
-        </p:spPr>
-      </p:sp>
-      <p:sp>
-        <p:nvSpPr>
-          <p:cNvPr id="7" name="Text 5"/>
-          <p:cNvSpPr/>
-          <p:nvPr/>
-        </p:nvSpPr>
-        <p:spPr>
-          <a:xfrm>
-            <a:off x="914400" y="2331720"/>
-            <a:ext cx="548640" cy="777240"/>
-          </a:xfrm>
-          <a:prstGeom prst="rect">
-            <a:avLst/>
-          </a:prstGeom>
-          <a:noFill/>
-          <a:ln/>
-        </p:spPr>
-        <p:txBody>
-          <a:bodyPr wrap="square" lIns="0" tIns="0" rIns="0" bIns="0" rtlCol="0" anchor="ctr"/>
-          <a:lstStyle/>
-          <a:p>
-            <a:pPr indent="0" marL="0">
-              <a:buNone/>
-            </a:pPr>
-            <a:r>
-              <a:rPr lang="en-US" sz="1800" b="1" dirty="0">
-                <a:solidFill>
-                  <a:srgbClr val="FFFFFF"/>
-                </a:solidFill>
-                <a:latin typeface="Arial" pitchFamily="34" charset="0"/>
-                <a:ea typeface="Arial" pitchFamily="34" charset="-122"/>
-                <a:cs typeface="Arial" pitchFamily="34" charset="-120"/>
-              </a:rPr>
-              <a:t>A</a:t>
-            </a:r>
-            <a:endParaRPr lang="en-US" sz="1800" dirty="0"/>
-          </a:p>
-        </p:txBody>
-      </p:sp>
-      <p:sp>
-        <p:nvSpPr>
-          <p:cNvPr id="8" name="Text 6"/>
-          <p:cNvSpPr/>
-          <p:nvPr/>
-        </p:nvSpPr>
-        <p:spPr>
-          <a:xfrm>
-            <a:off x="1554480" y="2331720"/>
-            <a:ext cx="9692640" cy="777240"/>
-          </a:xfrm>
-          <a:prstGeom prst="rect">
-            <a:avLst/>
-          </a:prstGeom>
-          <a:noFill/>
-          <a:ln/>
-        </p:spPr>
-        <p:txBody>
-          <a:bodyPr wrap="square" lIns="0" tIns="0" rIns="0" bIns="0" rtlCol="0" anchor="ctr"/>
-          <a:lstStyle/>
-          <a:p>
-            <a:pPr indent="0" marL="0">
-              <a:buNone/>
-            </a:pPr>
-            <a:r>
-              <a:rPr lang="en-US" sz="1300" dirty="0">
-                <a:solidFill>
-                  <a:srgbClr val="FFFFFF"/>
-                </a:solidFill>
-                <a:latin typeface="Arial" pitchFamily="34" charset="0"/>
-                <a:ea typeface="Arial" pitchFamily="34" charset="-122"/>
-                <a:cs typeface="Arial" pitchFamily="34" charset="-120"/>
-              </a:rPr>
-              <a:t>The air did it.</a:t>
-            </a:r>
-            <a:endParaRPr lang="en-US" sz="1300" dirty="0"/>
-          </a:p>
-        </p:txBody>
-      </p:sp>
-      <p:sp>
-        <p:nvSpPr>
-          <p:cNvPr id="9" name="Shape 7"/>
-          <p:cNvSpPr/>
-          <p:nvPr/>
-        </p:nvSpPr>
-        <p:spPr>
-          <a:xfrm>
-            <a:off x="731520" y="3246120"/>
-            <a:ext cx="10698480" cy="777240"/>
-          </a:xfrm>
-          <a:prstGeom prst="roundRect">
-            <a:avLst>
-              <a:gd name="adj" fmla="val 9412"/>
-            </a:avLst>
-          </a:prstGeom>
-          <a:solidFill>
-            <a:srgbClr val="7C5CAA"/>
-          </a:solidFill>
-          <a:ln/>
-        </p:spPr>
-      </p:sp>
-      <p:sp>
-        <p:nvSpPr>
-          <p:cNvPr id="10" name="Text 8"/>
-          <p:cNvSpPr/>
-          <p:nvPr/>
-        </p:nvSpPr>
-        <p:spPr>
-          <a:xfrm>
-            <a:off x="914400" y="3246120"/>
-            <a:ext cx="548640" cy="777240"/>
-          </a:xfrm>
-          <a:prstGeom prst="rect">
-            <a:avLst/>
-          </a:prstGeom>
-          <a:noFill/>
-          <a:ln/>
-        </p:spPr>
-        <p:txBody>
-          <a:bodyPr wrap="square" lIns="0" tIns="0" rIns="0" bIns="0" rtlCol="0" anchor="ctr"/>
-          <a:lstStyle/>
-          <a:p>
-            <a:pPr indent="0" marL="0">
-              <a:buNone/>
-            </a:pPr>
-            <a:r>
-              <a:rPr lang="en-US" sz="1800" b="1" dirty="0">
-                <a:solidFill>
-                  <a:srgbClr val="FFFFFF"/>
-                </a:solidFill>
-                <a:latin typeface="Arial" pitchFamily="34" charset="0"/>
-                <a:ea typeface="Arial" pitchFamily="34" charset="-122"/>
-                <a:cs typeface="Arial" pitchFamily="34" charset="-120"/>
-              </a:rPr>
-              <a:t>B</a:t>
-            </a:r>
-            <a:endParaRPr lang="en-US" sz="1800" dirty="0"/>
-          </a:p>
-        </p:txBody>
-      </p:sp>
-      <p:sp>
-        <p:nvSpPr>
-          <p:cNvPr id="11" name="Text 9"/>
-          <p:cNvSpPr/>
-          <p:nvPr/>
-        </p:nvSpPr>
-        <p:spPr>
-          <a:xfrm>
-            <a:off x="1554480" y="3246120"/>
-            <a:ext cx="9692640" cy="777240"/>
-          </a:xfrm>
-          <a:prstGeom prst="rect">
-            <a:avLst/>
-          </a:prstGeom>
-          <a:noFill/>
-          <a:ln/>
-        </p:spPr>
-        <p:txBody>
-          <a:bodyPr wrap="square" lIns="0" tIns="0" rIns="0" bIns="0" rtlCol="0" anchor="ctr"/>
-          <a:lstStyle/>
-          <a:p>
-            <a:pPr indent="0" marL="0">
-              <a:buNone/>
-            </a:pPr>
-            <a:r>
-              <a:rPr lang="en-US" sz="1300" dirty="0">
-                <a:solidFill>
-                  <a:srgbClr val="FFFFFF"/>
-                </a:solidFill>
-                <a:latin typeface="Arial" pitchFamily="34" charset="0"/>
-                <a:ea typeface="Arial" pitchFamily="34" charset="-122"/>
-                <a:cs typeface="Arial" pitchFamily="34" charset="-120"/>
-              </a:rPr>
-              <a:t>Air outside pushes on every unit of area of the jerrycan. With less air inside, the outside pressure is greater than the inside pressure, so the walls are pushed in.</a:t>
-            </a:r>
-            <a:endParaRPr lang="en-US" sz="1300" dirty="0"/>
-          </a:p>
-        </p:txBody>
-      </p:sp>
-      <p:sp>
-        <p:nvSpPr>
-          <p:cNvPr id="12" name="Shape 10"/>
-          <p:cNvSpPr/>
-          <p:nvPr/>
-        </p:nvSpPr>
-        <p:spPr>
-          <a:xfrm>
-            <a:off x="731520" y="4160520"/>
-            <a:ext cx="10698480" cy="777240"/>
-          </a:xfrm>
-          <a:prstGeom prst="roundRect">
-            <a:avLst>
-              <a:gd name="adj" fmla="val 9412"/>
-            </a:avLst>
-          </a:prstGeom>
-          <a:solidFill>
-            <a:srgbClr val="7C5CAA"/>
-          </a:solidFill>
-          <a:ln/>
-        </p:spPr>
-      </p:sp>
-      <p:sp>
-        <p:nvSpPr>
-          <p:cNvPr id="13" name="Text 11"/>
-          <p:cNvSpPr/>
-          <p:nvPr/>
-        </p:nvSpPr>
-        <p:spPr>
-          <a:xfrm>
-            <a:off x="914400" y="4160520"/>
-            <a:ext cx="548640" cy="777240"/>
-          </a:xfrm>
-          <a:prstGeom prst="rect">
-            <a:avLst/>
-          </a:prstGeom>
-          <a:noFill/>
-          <a:ln/>
-        </p:spPr>
-        <p:txBody>
-          <a:bodyPr wrap="square" lIns="0" tIns="0" rIns="0" bIns="0" rtlCol="0" anchor="ctr"/>
-          <a:lstStyle/>
-          <a:p>
-            <a:pPr indent="0" marL="0">
-              <a:buNone/>
-            </a:pPr>
-            <a:r>
-              <a:rPr lang="en-US" sz="1800" b="1" dirty="0">
-                <a:solidFill>
-                  <a:srgbClr val="FFFFFF"/>
-                </a:solidFill>
-                <a:latin typeface="Arial" pitchFamily="34" charset="0"/>
-                <a:ea typeface="Arial" pitchFamily="34" charset="-122"/>
-                <a:cs typeface="Arial" pitchFamily="34" charset="-120"/>
-              </a:rPr>
-              <a:t>C</a:t>
-            </a:r>
-            <a:endParaRPr lang="en-US" sz="1800" dirty="0"/>
-          </a:p>
-        </p:txBody>
-      </p:sp>
-      <p:sp>
-        <p:nvSpPr>
-          <p:cNvPr id="14" name="Text 12"/>
-          <p:cNvSpPr/>
-          <p:nvPr/>
-        </p:nvSpPr>
-        <p:spPr>
-          <a:xfrm>
-            <a:off x="1554480" y="4160520"/>
-            <a:ext cx="9692640" cy="777240"/>
-          </a:xfrm>
-          <a:prstGeom prst="rect">
-            <a:avLst/>
-          </a:prstGeom>
-          <a:noFill/>
-          <a:ln/>
-        </p:spPr>
-        <p:txBody>
-          <a:bodyPr wrap="square" lIns="0" tIns="0" rIns="0" bIns="0" rtlCol="0" anchor="ctr"/>
-          <a:lstStyle/>
-          <a:p>
-            <a:pPr indent="0" marL="0">
-              <a:buNone/>
-            </a:pPr>
-            <a:r>
-              <a:rPr lang="en-US" sz="1300" dirty="0">
-                <a:solidFill>
-                  <a:srgbClr val="FFFFFF"/>
-                </a:solidFill>
-                <a:latin typeface="Arial" pitchFamily="34" charset="0"/>
-                <a:ea typeface="Arial" pitchFamily="34" charset="-122"/>
-                <a:cs typeface="Arial" pitchFamily="34" charset="-120"/>
-              </a:rPr>
-              <a:t>Pressure cannot act on plastic, so the plastic became weak by itself.</a:t>
-            </a:r>
-            <a:endParaRPr lang="en-US" sz="1300" dirty="0"/>
-          </a:p>
-        </p:txBody>
-      </p:sp>
-      <p:sp>
-        <p:nvSpPr>
-          <p:cNvPr id="15" name="Shape 13"/>
-          <p:cNvSpPr/>
-          <p:nvPr/>
-        </p:nvSpPr>
-        <p:spPr>
-          <a:xfrm>
-            <a:off x="731520" y="5074920"/>
-            <a:ext cx="10698480" cy="777240"/>
-          </a:xfrm>
-          <a:prstGeom prst="roundRect">
-            <a:avLst>
-              <a:gd name="adj" fmla="val 9412"/>
-            </a:avLst>
-          </a:prstGeom>
-          <a:solidFill>
-            <a:srgbClr val="7C5CAA"/>
-          </a:solidFill>
-          <a:ln/>
-        </p:spPr>
-      </p:sp>
-      <p:sp>
-        <p:nvSpPr>
-          <p:cNvPr id="16" name="Text 14"/>
-          <p:cNvSpPr/>
-          <p:nvPr/>
-        </p:nvSpPr>
-        <p:spPr>
-          <a:xfrm>
-            <a:off x="914400" y="5074920"/>
-            <a:ext cx="548640" cy="777240"/>
-          </a:xfrm>
-          <a:prstGeom prst="rect">
-            <a:avLst/>
-          </a:prstGeom>
-          <a:noFill/>
-          <a:ln/>
-        </p:spPr>
-        <p:txBody>
-          <a:bodyPr wrap="square" lIns="0" tIns="0" rIns="0" bIns="0" rtlCol="0" anchor="ctr"/>
-          <a:lstStyle/>
-          <a:p>
-            <a:pPr indent="0" marL="0">
-              <a:buNone/>
-            </a:pPr>
-            <a:r>
-              <a:rPr lang="en-US" sz="1800" b="1" dirty="0">
-                <a:solidFill>
-                  <a:srgbClr val="FFFFFF"/>
-                </a:solidFill>
-                <a:latin typeface="Arial" pitchFamily="34" charset="0"/>
-                <a:ea typeface="Arial" pitchFamily="34" charset="-122"/>
-                <a:cs typeface="Arial" pitchFamily="34" charset="-120"/>
-              </a:rPr>
-              <a:t>D</a:t>
-            </a:r>
-            <a:endParaRPr lang="en-US" sz="1800" dirty="0"/>
-          </a:p>
-        </p:txBody>
-      </p:sp>
-      <p:sp>
-        <p:nvSpPr>
-          <p:cNvPr id="17" name="Text 15"/>
-          <p:cNvSpPr/>
-          <p:nvPr/>
-        </p:nvSpPr>
-        <p:spPr>
-          <a:xfrm>
-            <a:off x="1554480" y="5074920"/>
-            <a:ext cx="9692640" cy="777240"/>
-          </a:xfrm>
-          <a:prstGeom prst="rect">
-            <a:avLst/>
-          </a:prstGeom>
-          <a:noFill/>
-          <a:ln/>
-        </p:spPr>
-        <p:txBody>
-          <a:bodyPr wrap="square" lIns="0" tIns="0" rIns="0" bIns="0" rtlCol="0" anchor="ctr"/>
-          <a:lstStyle/>
-          <a:p>
-            <a:pPr indent="0" marL="0">
-              <a:buNone/>
-            </a:pPr>
-            <a:r>
-              <a:rPr lang="en-US" sz="1300" dirty="0">
-                <a:solidFill>
-                  <a:srgbClr val="FFFFFF"/>
-                </a:solidFill>
-                <a:latin typeface="Arial" pitchFamily="34" charset="0"/>
-                <a:ea typeface="Arial" pitchFamily="34" charset="-122"/>
-                <a:cs typeface="Arial" pitchFamily="34" charset="-120"/>
-              </a:rPr>
-              <a:t>The air outside got heavier and squashed the jerrycan.</a:t>
-            </a:r>
-            <a:endParaRPr lang="en-US" sz="1300" dirty="0"/>
-          </a:p>
-        </p:txBody>
-      </p:sp>
-      <p:sp>
-        <p:nvSpPr>
-          <p:cNvPr id="18" name="Text 16"/>
-          <p:cNvSpPr/>
-          <p:nvPr/>
-        </p:nvSpPr>
-        <p:spPr>
-          <a:xfrm>
-            <a:off x="11521440" y="6446520"/>
-            <a:ext cx="457200" cy="274320"/>
-          </a:xfrm>
-          <a:prstGeom prst="rect">
-            <a:avLst/>
-          </a:prstGeom>
-          <a:noFill/>
-          <a:ln/>
-        </p:spPr>
-        <p:txBody>
-          <a:bodyPr wrap="square" lIns="0" tIns="0" rIns="0" bIns="0" rtlCol="0" anchor="ctr"/>
-          <a:lstStyle/>
-          <a:p>
-            <a:pPr algn="r" indent="0" marL="0">
-              <a:buNone/>
-            </a:pPr>
-            <a:r>
-              <a:rPr lang="en-US" sz="1000" dirty="0">
-                <a:solidFill>
-                  <a:srgbClr val="C9B8E0"/>
-                </a:solidFill>
-                <a:latin typeface="Arial" pitchFamily="34" charset="0"/>
-                <a:ea typeface="Arial" pitchFamily="34" charset="-122"/>
-                <a:cs typeface="Arial" pitchFamily="34" charset="-120"/>
-              </a:rPr>
-              <a:t>10</a:t>
-            </a:r>
-            <a:endParaRPr lang="en-US" sz="1000" dirty="0"/>
-          </a:p>
-        </p:txBody>
-      </p:sp>
-    </p:spTree>
-  </p:cSld>
-  <p:clrMapOvr>
-    <a:masterClrMapping/>
-  </p:clrMapOvr>
-</p:sld>
-</file>
-
-<file path=ppt/slides/slide11.xml><?xml version="1.0" encoding="utf-8"?>
-<p:sld xmlns:a="http://schemas.openxmlformats.org/drawingml/2006/main" xmlns:r="http://schemas.openxmlformats.org/officeDocument/2006/relationships" xmlns:p="http://schemas.openxmlformats.org/presentationml/2006/main">
-  <p:cSld name="Slide 11">
-    <p:bg>
-      <p:bgPr>
-        <a:solidFill>
-          <a:srgbClr val="6A4C93"/>
-        </a:solidFill>
-      </p:bgPr>
-    </p:bg>
-    <p:spTree>
-      <p:nvGrpSpPr>
-        <p:cNvPr id="1" name=""/>
-        <p:cNvGrpSpPr/>
-        <p:nvPr/>
-      </p:nvGrpSpPr>
-      <p:grpSpPr>
-        <a:xfrm>
-          <a:off x="0" y="0"/>
-          <a:ext cx="0" cy="0"/>
-          <a:chOff x="0" y="0"/>
-          <a:chExt cx="0" cy="0"/>
-        </a:xfrm>
-      </p:grpSpPr>
-      <p:sp>
-        <p:nvSpPr>
-          <p:cNvPr id="2" name="Text 0"/>
-          <p:cNvSpPr/>
-          <p:nvPr/>
-        </p:nvSpPr>
-        <p:spPr>
-          <a:xfrm>
-            <a:off x="548640" y="365760"/>
-            <a:ext cx="6400800" cy="365760"/>
-          </a:xfrm>
-          <a:prstGeom prst="rect">
-            <a:avLst/>
-          </a:prstGeom>
-          <a:noFill/>
-          <a:ln/>
-        </p:spPr>
-        <p:txBody>
-          <a:bodyPr wrap="square" lIns="0" tIns="0" rIns="0" bIns="0" rtlCol="0" anchor="ctr"/>
-          <a:lstStyle/>
-          <a:p>
-            <a:pPr indent="0" marL="0">
-              <a:buNone/>
-            </a:pPr>
-            <a:r>
-              <a:rPr lang="en-US" sz="1300" b="1" spc="200" kern="0" dirty="0">
-                <a:solidFill>
-                  <a:srgbClr val="E0D6F0"/>
-                </a:solidFill>
-                <a:latin typeface="Arial" pitchFamily="34" charset="0"/>
-                <a:ea typeface="Arial" pitchFamily="34" charset="-122"/>
-                <a:cs typeface="Arial" pitchFamily="34" charset="-120"/>
-              </a:rPr>
-              <a:t>QUESTION 10 OF 10</a:t>
-            </a:r>
-            <a:endParaRPr lang="en-US" sz="1300" dirty="0"/>
-          </a:p>
-        </p:txBody>
-      </p:sp>
-      <p:sp>
-        <p:nvSpPr>
-          <p:cNvPr id="3" name="Shape 1"/>
-          <p:cNvSpPr/>
-          <p:nvPr/>
-        </p:nvSpPr>
-        <p:spPr>
-          <a:xfrm>
-            <a:off x="8138160" y="320040"/>
-            <a:ext cx="3474720" cy="365760"/>
-          </a:xfrm>
-          <a:prstGeom prst="roundRect">
-            <a:avLst>
-              <a:gd name="adj" fmla="val 15000"/>
-            </a:avLst>
-          </a:prstGeom>
-          <a:solidFill>
-            <a:srgbClr val="5A3F80"/>
-          </a:solidFill>
-          <a:ln/>
-        </p:spPr>
-      </p:sp>
-      <p:sp>
-        <p:nvSpPr>
-          <p:cNvPr id="4" name="Text 2"/>
-          <p:cNvSpPr/>
-          <p:nvPr/>
-        </p:nvSpPr>
-        <p:spPr>
-          <a:xfrm>
-            <a:off x="8138160" y="320040"/>
-            <a:ext cx="3474720" cy="365760"/>
-          </a:xfrm>
-          <a:prstGeom prst="rect">
-            <a:avLst/>
-          </a:prstGeom>
-          <a:noFill/>
-          <a:ln/>
-        </p:spPr>
-        <p:txBody>
-          <a:bodyPr wrap="square" lIns="0" tIns="0" rIns="0" bIns="0" rtlCol="0" anchor="ctr"/>
-          <a:lstStyle/>
-          <a:p>
-            <a:pPr algn="ctr" indent="0" marL="0">
-              <a:buNone/>
-            </a:pPr>
-            <a:r>
-              <a:rPr lang="en-US" sz="1100" i="1" dirty="0">
-                <a:solidFill>
-                  <a:srgbClr val="E0D6F0"/>
-                </a:solidFill>
-                <a:latin typeface="Arial" pitchFamily="34" charset="0"/>
-                <a:ea typeface="Arial" pitchFamily="34" charset="-122"/>
-                <a:cs typeface="Arial" pitchFamily="34" charset="-120"/>
-              </a:rPr>
-              <a:t>Use after: Model Building phase</a:t>
-            </a:r>
-            <a:endParaRPr lang="en-US" sz="1100" dirty="0"/>
-          </a:p>
-        </p:txBody>
-      </p:sp>
-      <p:sp>
-        <p:nvSpPr>
-          <p:cNvPr id="5" name="Text 3"/>
-          <p:cNvSpPr/>
-          <p:nvPr/>
-        </p:nvSpPr>
-        <p:spPr>
-          <a:xfrm>
-            <a:off x="548640" y="868680"/>
-            <a:ext cx="11064240" cy="1325880"/>
-          </a:xfrm>
-          <a:prstGeom prst="rect">
-            <a:avLst/>
-          </a:prstGeom>
-          <a:noFill/>
-          <a:ln/>
-        </p:spPr>
-        <p:txBody>
-          <a:bodyPr wrap="square" lIns="0" tIns="0" rIns="0" bIns="0" rtlCol="0" anchor="ctr"/>
-          <a:lstStyle/>
-          <a:p>
-            <a:pPr indent="0" marL="0">
-              <a:buNone/>
-            </a:pPr>
-            <a:r>
-              <a:rPr lang="en-US" sz="2000" b="1" dirty="0">
-                <a:solidFill>
-                  <a:srgbClr val="FFFFFF"/>
-                </a:solidFill>
-                <a:latin typeface="Arial" pitchFamily="34" charset="0"/>
-                <a:ea typeface="Arial" pitchFamily="34" charset="-122"/>
-                <a:cs typeface="Arial" pitchFamily="34" charset="-120"/>
-              </a:rPr>
-              <a:t>A full jerrycan does not collapse, but the same jerrycan collapses when some air is removed. Which sentence correctly completes the model: 'The full jerrycan stayed intact because ___.'?</a:t>
-            </a:r>
-            <a:endParaRPr lang="en-US" sz="2000" dirty="0"/>
-          </a:p>
-        </p:txBody>
-      </p:sp>
-      <p:sp>
-        <p:nvSpPr>
-          <p:cNvPr id="6" name="Shape 4"/>
-          <p:cNvSpPr/>
-          <p:nvPr/>
-        </p:nvSpPr>
-        <p:spPr>
-          <a:xfrm>
-            <a:off x="731520" y="2331720"/>
-            <a:ext cx="10698480" cy="777240"/>
-          </a:xfrm>
-          <a:prstGeom prst="roundRect">
-            <a:avLst>
-              <a:gd name="adj" fmla="val 9412"/>
-            </a:avLst>
-          </a:prstGeom>
-          <a:solidFill>
-            <a:srgbClr val="7C5CAA"/>
-          </a:solidFill>
-          <a:ln/>
-        </p:spPr>
-      </p:sp>
-      <p:sp>
-        <p:nvSpPr>
-          <p:cNvPr id="7" name="Text 5"/>
-          <p:cNvSpPr/>
-          <p:nvPr/>
-        </p:nvSpPr>
-        <p:spPr>
-          <a:xfrm>
-            <a:off x="914400" y="2331720"/>
-            <a:ext cx="548640" cy="777240"/>
-          </a:xfrm>
-          <a:prstGeom prst="rect">
-            <a:avLst/>
-          </a:prstGeom>
-          <a:noFill/>
-          <a:ln/>
-        </p:spPr>
-        <p:txBody>
-          <a:bodyPr wrap="square" lIns="0" tIns="0" rIns="0" bIns="0" rtlCol="0" anchor="ctr"/>
-          <a:lstStyle/>
-          <a:p>
-            <a:pPr indent="0" marL="0">
-              <a:buNone/>
-            </a:pPr>
-            <a:r>
-              <a:rPr lang="en-US" sz="1800" b="1" dirty="0">
-                <a:solidFill>
-                  <a:srgbClr val="FFFFFF"/>
-                </a:solidFill>
-                <a:latin typeface="Arial" pitchFamily="34" charset="0"/>
-                <a:ea typeface="Arial" pitchFamily="34" charset="-122"/>
-                <a:cs typeface="Arial" pitchFamily="34" charset="-120"/>
-              </a:rPr>
-              <a:t>A</a:t>
-            </a:r>
-            <a:endParaRPr lang="en-US" sz="1800" dirty="0"/>
-          </a:p>
-        </p:txBody>
-      </p:sp>
-      <p:sp>
-        <p:nvSpPr>
-          <p:cNvPr id="8" name="Text 6"/>
-          <p:cNvSpPr/>
-          <p:nvPr/>
-        </p:nvSpPr>
-        <p:spPr>
-          <a:xfrm>
-            <a:off x="1554480" y="2331720"/>
-            <a:ext cx="9692640" cy="777240"/>
-          </a:xfrm>
-          <a:prstGeom prst="rect">
-            <a:avLst/>
-          </a:prstGeom>
-          <a:noFill/>
-          <a:ln/>
-        </p:spPr>
-        <p:txBody>
-          <a:bodyPr wrap="square" lIns="0" tIns="0" rIns="0" bIns="0" rtlCol="0" anchor="ctr"/>
-          <a:lstStyle/>
-          <a:p>
-            <a:pPr indent="0" marL="0">
-              <a:buNone/>
-            </a:pPr>
-            <a:r>
-              <a:rPr lang="en-US" sz="1500" dirty="0">
-                <a:solidFill>
-                  <a:srgbClr val="FFFFFF"/>
-                </a:solidFill>
-                <a:latin typeface="Arial" pitchFamily="34" charset="0"/>
-                <a:ea typeface="Arial" pitchFamily="34" charset="-122"/>
-                <a:cs typeface="Arial" pitchFamily="34" charset="-120"/>
-              </a:rPr>
-              <a:t>air pressure pushes only from above, and the plastic is strong enough to resist it</a:t>
-            </a:r>
-            <a:endParaRPr lang="en-US" sz="1500" dirty="0"/>
-          </a:p>
-        </p:txBody>
-      </p:sp>
-      <p:sp>
-        <p:nvSpPr>
-          <p:cNvPr id="9" name="Shape 7"/>
-          <p:cNvSpPr/>
-          <p:nvPr/>
-        </p:nvSpPr>
-        <p:spPr>
-          <a:xfrm>
-            <a:off x="731520" y="3246120"/>
-            <a:ext cx="10698480" cy="777240"/>
-          </a:xfrm>
-          <a:prstGeom prst="roundRect">
-            <a:avLst>
-              <a:gd name="adj" fmla="val 9412"/>
-            </a:avLst>
-          </a:prstGeom>
-          <a:solidFill>
-            <a:srgbClr val="7C5CAA"/>
-          </a:solidFill>
-          <a:ln/>
-        </p:spPr>
-      </p:sp>
-      <p:sp>
-        <p:nvSpPr>
-          <p:cNvPr id="10" name="Text 8"/>
-          <p:cNvSpPr/>
-          <p:nvPr/>
-        </p:nvSpPr>
-        <p:spPr>
-          <a:xfrm>
-            <a:off x="914400" y="3246120"/>
-            <a:ext cx="548640" cy="777240"/>
-          </a:xfrm>
-          <a:prstGeom prst="rect">
-            <a:avLst/>
-          </a:prstGeom>
-          <a:noFill/>
-          <a:ln/>
-        </p:spPr>
-        <p:txBody>
-          <a:bodyPr wrap="square" lIns="0" tIns="0" rIns="0" bIns="0" rtlCol="0" anchor="ctr"/>
-          <a:lstStyle/>
-          <a:p>
-            <a:pPr indent="0" marL="0">
-              <a:buNone/>
-            </a:pPr>
-            <a:r>
-              <a:rPr lang="en-US" sz="1800" b="1" dirty="0">
-                <a:solidFill>
-                  <a:srgbClr val="FFFFFF"/>
-                </a:solidFill>
-                <a:latin typeface="Arial" pitchFamily="34" charset="0"/>
-                <a:ea typeface="Arial" pitchFamily="34" charset="-122"/>
-                <a:cs typeface="Arial" pitchFamily="34" charset="-120"/>
-              </a:rPr>
-              <a:t>B</a:t>
-            </a:r>
-            <a:endParaRPr lang="en-US" sz="1800" dirty="0"/>
-          </a:p>
-        </p:txBody>
-      </p:sp>
-      <p:sp>
-        <p:nvSpPr>
-          <p:cNvPr id="11" name="Text 9"/>
-          <p:cNvSpPr/>
-          <p:nvPr/>
-        </p:nvSpPr>
-        <p:spPr>
-          <a:xfrm>
-            <a:off x="1554480" y="3246120"/>
-            <a:ext cx="9692640" cy="777240"/>
-          </a:xfrm>
-          <a:prstGeom prst="rect">
-            <a:avLst/>
-          </a:prstGeom>
-          <a:noFill/>
-          <a:ln/>
-        </p:spPr>
-        <p:txBody>
-          <a:bodyPr wrap="square" lIns="0" tIns="0" rIns="0" bIns="0" rtlCol="0" anchor="ctr"/>
-          <a:lstStyle/>
-          <a:p>
-            <a:pPr indent="0" marL="0">
-              <a:buNone/>
-            </a:pPr>
-            <a:r>
-              <a:rPr lang="en-US" sz="1500" dirty="0">
-                <a:solidFill>
-                  <a:srgbClr val="FFFFFF"/>
-                </a:solidFill>
-                <a:latin typeface="Arial" pitchFamily="34" charset="0"/>
-                <a:ea typeface="Arial" pitchFamily="34" charset="-122"/>
-                <a:cs typeface="Arial" pitchFamily="34" charset="-120"/>
-              </a:rPr>
-              <a:t>the air pressure inside pushing outwards balanced the air pressure outside pushing inwards</a:t>
-            </a:r>
-            <a:endParaRPr lang="en-US" sz="1500" dirty="0"/>
-          </a:p>
-        </p:txBody>
-      </p:sp>
-      <p:sp>
-        <p:nvSpPr>
-          <p:cNvPr id="12" name="Shape 10"/>
-          <p:cNvSpPr/>
-          <p:nvPr/>
-        </p:nvSpPr>
-        <p:spPr>
-          <a:xfrm>
-            <a:off x="731520" y="4160520"/>
-            <a:ext cx="10698480" cy="777240"/>
-          </a:xfrm>
-          <a:prstGeom prst="roundRect">
-            <a:avLst>
-              <a:gd name="adj" fmla="val 9412"/>
-            </a:avLst>
-          </a:prstGeom>
-          <a:solidFill>
-            <a:srgbClr val="7C5CAA"/>
-          </a:solidFill>
-          <a:ln/>
-        </p:spPr>
-      </p:sp>
-      <p:sp>
-        <p:nvSpPr>
-          <p:cNvPr id="13" name="Text 11"/>
-          <p:cNvSpPr/>
-          <p:nvPr/>
-        </p:nvSpPr>
-        <p:spPr>
-          <a:xfrm>
-            <a:off x="914400" y="4160520"/>
-            <a:ext cx="548640" cy="777240"/>
-          </a:xfrm>
-          <a:prstGeom prst="rect">
-            <a:avLst/>
-          </a:prstGeom>
-          <a:noFill/>
-          <a:ln/>
-        </p:spPr>
-        <p:txBody>
-          <a:bodyPr wrap="square" lIns="0" tIns="0" rIns="0" bIns="0" rtlCol="0" anchor="ctr"/>
-          <a:lstStyle/>
-          <a:p>
-            <a:pPr indent="0" marL="0">
-              <a:buNone/>
-            </a:pPr>
-            <a:r>
-              <a:rPr lang="en-US" sz="1800" b="1" dirty="0">
-                <a:solidFill>
-                  <a:srgbClr val="FFFFFF"/>
-                </a:solidFill>
-                <a:latin typeface="Arial" pitchFamily="34" charset="0"/>
-                <a:ea typeface="Arial" pitchFamily="34" charset="-122"/>
-                <a:cs typeface="Arial" pitchFamily="34" charset="-120"/>
-              </a:rPr>
-              <a:t>C</a:t>
-            </a:r>
-            <a:endParaRPr lang="en-US" sz="1800" dirty="0"/>
-          </a:p>
-        </p:txBody>
-      </p:sp>
-      <p:sp>
-        <p:nvSpPr>
-          <p:cNvPr id="14" name="Text 12"/>
-          <p:cNvSpPr/>
-          <p:nvPr/>
-        </p:nvSpPr>
-        <p:spPr>
-          <a:xfrm>
-            <a:off x="1554480" y="4160520"/>
-            <a:ext cx="9692640" cy="777240"/>
-          </a:xfrm>
-          <a:prstGeom prst="rect">
-            <a:avLst/>
-          </a:prstGeom>
-          <a:noFill/>
-          <a:ln/>
-        </p:spPr>
-        <p:txBody>
-          <a:bodyPr wrap="square" lIns="0" tIns="0" rIns="0" bIns="0" rtlCol="0" anchor="ctr"/>
-          <a:lstStyle/>
-          <a:p>
-            <a:pPr indent="0" marL="0">
-              <a:buNone/>
-            </a:pPr>
-            <a:r>
-              <a:rPr lang="en-US" sz="1500" dirty="0">
-                <a:solidFill>
-                  <a:srgbClr val="FFFFFF"/>
-                </a:solidFill>
-                <a:latin typeface="Arial" pitchFamily="34" charset="0"/>
-                <a:ea typeface="Arial" pitchFamily="34" charset="-122"/>
-                <a:cs typeface="Arial" pitchFamily="34" charset="-120"/>
-              </a:rPr>
-              <a:t>there is no air pressure acting on a full jerrycan</a:t>
-            </a:r>
-            <a:endParaRPr lang="en-US" sz="1500" dirty="0"/>
-          </a:p>
-        </p:txBody>
-      </p:sp>
-      <p:sp>
-        <p:nvSpPr>
-          <p:cNvPr id="15" name="Shape 13"/>
-          <p:cNvSpPr/>
-          <p:nvPr/>
-        </p:nvSpPr>
-        <p:spPr>
-          <a:xfrm>
-            <a:off x="731520" y="5074920"/>
-            <a:ext cx="10698480" cy="777240"/>
-          </a:xfrm>
-          <a:prstGeom prst="roundRect">
-            <a:avLst>
-              <a:gd name="adj" fmla="val 9412"/>
-            </a:avLst>
-          </a:prstGeom>
-          <a:solidFill>
-            <a:srgbClr val="7C5CAA"/>
-          </a:solidFill>
-          <a:ln/>
-        </p:spPr>
-      </p:sp>
-      <p:sp>
-        <p:nvSpPr>
-          <p:cNvPr id="16" name="Text 14"/>
-          <p:cNvSpPr/>
-          <p:nvPr/>
-        </p:nvSpPr>
-        <p:spPr>
-          <a:xfrm>
-            <a:off x="914400" y="5074920"/>
-            <a:ext cx="548640" cy="777240"/>
-          </a:xfrm>
-          <a:prstGeom prst="rect">
-            <a:avLst/>
-          </a:prstGeom>
-          <a:noFill/>
-          <a:ln/>
-        </p:spPr>
-        <p:txBody>
-          <a:bodyPr wrap="square" lIns="0" tIns="0" rIns="0" bIns="0" rtlCol="0" anchor="ctr"/>
-          <a:lstStyle/>
-          <a:p>
-            <a:pPr indent="0" marL="0">
-              <a:buNone/>
-            </a:pPr>
-            <a:r>
-              <a:rPr lang="en-US" sz="1800" b="1" dirty="0">
-                <a:solidFill>
-                  <a:srgbClr val="FFFFFF"/>
-                </a:solidFill>
-                <a:latin typeface="Arial" pitchFamily="34" charset="0"/>
-                <a:ea typeface="Arial" pitchFamily="34" charset="-122"/>
-                <a:cs typeface="Arial" pitchFamily="34" charset="-120"/>
-              </a:rPr>
-              <a:t>D</a:t>
-            </a:r>
-            <a:endParaRPr lang="en-US" sz="1800" dirty="0"/>
-          </a:p>
-        </p:txBody>
-      </p:sp>
-      <p:sp>
-        <p:nvSpPr>
-          <p:cNvPr id="17" name="Text 15"/>
-          <p:cNvSpPr/>
-          <p:nvPr/>
-        </p:nvSpPr>
-        <p:spPr>
-          <a:xfrm>
-            <a:off x="1554480" y="5074920"/>
-            <a:ext cx="9692640" cy="777240"/>
-          </a:xfrm>
-          <a:prstGeom prst="rect">
-            <a:avLst/>
-          </a:prstGeom>
-          <a:noFill/>
-          <a:ln/>
-        </p:spPr>
-        <p:txBody>
-          <a:bodyPr wrap="square" lIns="0" tIns="0" rIns="0" bIns="0" rtlCol="0" anchor="ctr"/>
-          <a:lstStyle/>
-          <a:p>
-            <a:pPr indent="0" marL="0">
-              <a:buNone/>
-            </a:pPr>
-            <a:r>
-              <a:rPr lang="en-US" sz="1500" dirty="0">
-                <a:solidFill>
-                  <a:srgbClr val="FFFFFF"/>
-                </a:solidFill>
-                <a:latin typeface="Arial" pitchFamily="34" charset="0"/>
-                <a:ea typeface="Arial" pitchFamily="34" charset="-122"/>
-                <a:cs typeface="Arial" pitchFamily="34" charset="-120"/>
-              </a:rPr>
-              <a:t>the air outside is lighter than the air inside a full jerrycan</a:t>
-            </a:r>
-            <a:endParaRPr lang="en-US" sz="1500" dirty="0"/>
-          </a:p>
-        </p:txBody>
-      </p:sp>
-      <p:sp>
-        <p:nvSpPr>
-          <p:cNvPr id="18" name="Text 16"/>
-          <p:cNvSpPr/>
-          <p:nvPr/>
-        </p:nvSpPr>
-        <p:spPr>
-          <a:xfrm>
-            <a:off x="11521440" y="6446520"/>
-            <a:ext cx="457200" cy="274320"/>
-          </a:xfrm>
-          <a:prstGeom prst="rect">
-            <a:avLst/>
-          </a:prstGeom>
-          <a:noFill/>
-          <a:ln/>
-        </p:spPr>
-        <p:txBody>
-          <a:bodyPr wrap="square" lIns="0" tIns="0" rIns="0" bIns="0" rtlCol="0" anchor="ctr"/>
-          <a:lstStyle/>
-          <a:p>
-            <a:pPr algn="r" indent="0" marL="0">
-              <a:buNone/>
-            </a:pPr>
-            <a:r>
-              <a:rPr lang="en-US" sz="1000" dirty="0">
-                <a:solidFill>
-                  <a:srgbClr val="C9B8E0"/>
-                </a:solidFill>
-                <a:latin typeface="Arial" pitchFamily="34" charset="0"/>
-                <a:ea typeface="Arial" pitchFamily="34" charset="-122"/>
-                <a:cs typeface="Arial" pitchFamily="34" charset="-120"/>
-              </a:rPr>
-              <a:t>11</a:t>
-            </a:r>
-            <a:endParaRPr lang="en-US" sz="1000" dirty="0"/>
-          </a:p>
-        </p:txBody>
-      </p:sp>
-    </p:spTree>
-  </p:cSld>
-  <p:clrMapOvr>
-    <a:masterClrMapping/>
-  </p:clrMapOvr>
-</p:sld>
-</file>
-
-<file path=ppt/slides/slide12.xml><?xml version="1.0" encoding="utf-8"?>
-<p:sld xmlns:a="http://schemas.openxmlformats.org/drawingml/2006/main" xmlns:r="http://schemas.openxmlformats.org/officeDocument/2006/relationships" xmlns:p="http://schemas.openxmlformats.org/presentationml/2006/main">
-  <p:cSld name="Slide 12">
     <p:bg>
       <p:bgPr>
         <a:solidFill>
@@ -3518,7 +2120,7 @@
                 <a:ea typeface="Arial" pitchFamily="34" charset="-122"/>
                 <a:cs typeface="Arial" pitchFamily="34" charset="-120"/>
               </a:rPr>
-              <a:t>QUESTION 1 OF 10</a:t>
+              <a:t>QUESTION 1 OF 8</a:t>
             </a:r>
             <a:endParaRPr lang="en-US" sz="1300" dirty="0"/>
           </a:p>
@@ -3610,17 +2212,17 @@
               <a:buNone/>
             </a:pPr>
             <a:r>
-              <a:rPr lang="en-US" sz="1800" b="1" dirty="0">
-                <a:solidFill>
-                  <a:srgbClr val="FFFFFF"/>
-                </a:solidFill>
-                <a:latin typeface="Arial" pitchFamily="34" charset="0"/>
-                <a:ea typeface="Arial" pitchFamily="34" charset="-122"/>
-                <a:cs typeface="Arial" pitchFamily="34" charset="-120"/>
-              </a:rPr>
-              <a:t>A plastic jerrycan had some air removed from inside, sealed, and then left on a bench. It has collapsed inwards. Which statement best describes the forces the outside air exerts on this jerrycan?</a:t>
-            </a:r>
-            <a:endParaRPr lang="en-US" sz="1800" dirty="0"/>
+              <a:rPr lang="en-US" sz="2000" b="1" dirty="0">
+                <a:solidFill>
+                  <a:srgbClr val="FFFFFF"/>
+                </a:solidFill>
+                <a:latin typeface="Arial" pitchFamily="34" charset="0"/>
+                <a:ea typeface="Arial" pitchFamily="34" charset="-122"/>
+                <a:cs typeface="Arial" pitchFamily="34" charset="-120"/>
+              </a:rPr>
+              <a:t>A sealed empty plastic jerrycan has had some air removed from inside and it is crumpling inwards. Which statement best describes how the air OUTSIDE is acting on it?</a:t>
+            </a:r>
+            <a:endParaRPr lang="en-US" sz="2000" dirty="0"/>
           </a:p>
         </p:txBody>
       </p:sp>
@@ -3710,17 +2312,17 @@
               <a:buNone/>
             </a:pPr>
             <a:r>
-              <a:rPr lang="en-US" sz="1500" dirty="0">
-                <a:solidFill>
-                  <a:srgbClr val="FFFFFF"/>
-                </a:solidFill>
-                <a:latin typeface="Arial" pitchFamily="34" charset="0"/>
-                <a:ea typeface="Arial" pitchFamily="34" charset="-122"/>
-                <a:cs typeface="Arial" pitchFamily="34" charset="-120"/>
-              </a:rPr>
-              <a:t>No air is pushing on it, because the air outside cannot be seen or felt.</a:t>
-            </a:r>
-            <a:endParaRPr lang="en-US" sz="1500" dirty="0"/>
+              <a:rPr lang="en-US" sz="1700" dirty="0">
+                <a:solidFill>
+                  <a:srgbClr val="FFFFFF"/>
+                </a:solidFill>
+                <a:latin typeface="Arial" pitchFamily="34" charset="0"/>
+                <a:ea typeface="Arial" pitchFamily="34" charset="-122"/>
+                <a:cs typeface="Arial" pitchFamily="34" charset="-120"/>
+              </a:rPr>
+              <a:t>It pushes only on the sides, because the top and bottom are flat</a:t>
+            </a:r>
+            <a:endParaRPr lang="en-US" sz="1700" dirty="0"/>
           </a:p>
         </p:txBody>
       </p:sp>
@@ -3810,17 +2412,17 @@
               <a:buNone/>
             </a:pPr>
             <a:r>
-              <a:rPr lang="en-US" sz="1500" dirty="0">
-                <a:solidFill>
-                  <a:srgbClr val="FFFFFF"/>
-                </a:solidFill>
-                <a:latin typeface="Arial" pitchFamily="34" charset="0"/>
-                <a:ea typeface="Arial" pitchFamily="34" charset="-122"/>
-                <a:cs typeface="Arial" pitchFamily="34" charset="-120"/>
-              </a:rPr>
-              <a:t>The air pushes only on the top of the jerrycan, pressing it downwards.</a:t>
-            </a:r>
-            <a:endParaRPr lang="en-US" sz="1500" dirty="0"/>
+              <a:rPr lang="en-US" sz="1700" dirty="0">
+                <a:solidFill>
+                  <a:srgbClr val="FFFFFF"/>
+                </a:solidFill>
+                <a:latin typeface="Arial" pitchFamily="34" charset="0"/>
+                <a:ea typeface="Arial" pitchFamily="34" charset="-122"/>
+                <a:cs typeface="Arial" pitchFamily="34" charset="-120"/>
+              </a:rPr>
+              <a:t>It pushes only downwards on the top of the jerrycan</a:t>
+            </a:r>
+            <a:endParaRPr lang="en-US" sz="1700" dirty="0"/>
           </a:p>
         </p:txBody>
       </p:sp>
@@ -3910,17 +2512,17 @@
               <a:buNone/>
             </a:pPr>
             <a:r>
-              <a:rPr lang="en-US" sz="1500" dirty="0">
-                <a:solidFill>
-                  <a:srgbClr val="FFFFFF"/>
-                </a:solidFill>
-                <a:latin typeface="Arial" pitchFamily="34" charset="0"/>
-                <a:ea typeface="Arial" pitchFamily="34" charset="-122"/>
-                <a:cs typeface="Arial" pitchFamily="34" charset="-120"/>
-              </a:rPr>
-              <a:t>The air pushes inwards on every face of the jerrycan: top, bottom and all four sides.</a:t>
-            </a:r>
-            <a:endParaRPr lang="en-US" sz="1500" dirty="0"/>
+              <a:rPr lang="en-US" sz="1700" dirty="0">
+                <a:solidFill>
+                  <a:srgbClr val="FFFFFF"/>
+                </a:solidFill>
+                <a:latin typeface="Arial" pitchFamily="34" charset="0"/>
+                <a:ea typeface="Arial" pitchFamily="34" charset="-122"/>
+                <a:cs typeface="Arial" pitchFamily="34" charset="-120"/>
+              </a:rPr>
+              <a:t>It pushes inwards on every face: top, bottom and all four sides</a:t>
+            </a:r>
+            <a:endParaRPr lang="en-US" sz="1700" dirty="0"/>
           </a:p>
         </p:txBody>
       </p:sp>
@@ -4010,17 +2612,17 @@
               <a:buNone/>
             </a:pPr>
             <a:r>
-              <a:rPr lang="en-US" sz="1500" dirty="0">
-                <a:solidFill>
-                  <a:srgbClr val="FFFFFF"/>
-                </a:solidFill>
-                <a:latin typeface="Arial" pitchFamily="34" charset="0"/>
-                <a:ea typeface="Arial" pitchFamily="34" charset="-122"/>
-                <a:cs typeface="Arial" pitchFamily="34" charset="-120"/>
-              </a:rPr>
-              <a:t>The air inside has pushed in on the walls and made the jerrycan collapse.</a:t>
-            </a:r>
-            <a:endParaRPr lang="en-US" sz="1500" dirty="0"/>
+              <a:rPr lang="en-US" sz="1700" dirty="0">
+                <a:solidFill>
+                  <a:srgbClr val="FFFFFF"/>
+                </a:solidFill>
+                <a:latin typeface="Arial" pitchFamily="34" charset="0"/>
+                <a:ea typeface="Arial" pitchFamily="34" charset="-122"/>
+                <a:cs typeface="Arial" pitchFamily="34" charset="-120"/>
+              </a:rPr>
+              <a:t>It does not push at all; the plastic simply becomes weak</a:t>
+            </a:r>
+            <a:endParaRPr lang="en-US" sz="1700" dirty="0"/>
           </a:p>
         </p:txBody>
       </p:sp>
@@ -4128,7 +2730,7 @@
                 <a:ea typeface="Arial" pitchFamily="34" charset="-122"/>
                 <a:cs typeface="Arial" pitchFamily="34" charset="-120"/>
               </a:rPr>
-              <a:t>QUESTION 2 OF 10</a:t>
+              <a:t>QUESTION 2 OF 8</a:t>
             </a:r>
             <a:endParaRPr lang="en-US" sz="1300" dirty="0"/>
           </a:p>
@@ -4220,17 +2822,17 @@
               <a:buNone/>
             </a:pPr>
             <a:r>
-              <a:rPr lang="en-US" sz="1800" b="1" dirty="0">
-                <a:solidFill>
-                  <a:srgbClr val="FFFFFF"/>
-                </a:solidFill>
-                <a:latin typeface="Arial" pitchFamily="34" charset="0"/>
-                <a:ea typeface="Arial" pitchFamily="34" charset="-122"/>
-                <a:cs typeface="Arial" pitchFamily="34" charset="-120"/>
-              </a:rPr>
-              <a:t>A teacher presses a flat 300 g textbook on her palm, then presses a sharpened pencil tip on her palm with about the same force. The pencil feels much sharper and more painful. What is the main reason?</a:t>
-            </a:r>
-            <a:endParaRPr lang="en-US" sz="1800" dirty="0"/>
+              <a:rPr lang="en-US" sz="2000" b="1" dirty="0">
+                <a:solidFill>
+                  <a:srgbClr val="FFFFFF"/>
+                </a:solidFill>
+                <a:latin typeface="Arial" pitchFamily="34" charset="0"/>
+                <a:ea typeface="Arial" pitchFamily="34" charset="-122"/>
+                <a:cs typeface="Arial" pitchFamily="34" charset="-120"/>
+              </a:rPr>
+              <a:t>A teacher presses a flat textbook onto her palm, then presses a sharp pencil tip onto her palm with about the same force. The pencil feels much more painful. What is the best explanation?</a:t>
+            </a:r>
+            <a:endParaRPr lang="en-US" sz="2000" dirty="0"/>
           </a:p>
         </p:txBody>
       </p:sp>
@@ -4328,7 +2930,7 @@
                 <a:ea typeface="Arial" pitchFamily="34" charset="-122"/>
                 <a:cs typeface="Arial" pitchFamily="34" charset="-120"/>
               </a:rPr>
-              <a:t>The pencil tip touches a much smaller area, so the same force gives a greater pressure.</a:t>
+              <a:t>The book has a smaller area, so it spreads the force less</a:t>
             </a:r>
             <a:endParaRPr lang="en-US" sz="1500" dirty="0"/>
           </a:p>
@@ -4428,7 +3030,7 @@
                 <a:ea typeface="Arial" pitchFamily="34" charset="-122"/>
                 <a:cs typeface="Arial" pitchFamily="34" charset="-120"/>
               </a:rPr>
-              <a:t>The pencil tip touches a much smaller area, so it gives a smaller pressure.</a:t>
+              <a:t>The force is about the same, but the pencil tip has a much smaller contact area, so the pressure is greater</a:t>
             </a:r>
             <a:endParaRPr lang="en-US" sz="1500" dirty="0"/>
           </a:p>
@@ -4528,7 +3130,7 @@
                 <a:ea typeface="Arial" pitchFamily="34" charset="-122"/>
                 <a:cs typeface="Arial" pitchFamily="34" charset="-120"/>
               </a:rPr>
-              <a:t>The pencil is harder than the book, so its force is larger.</a:t>
+              <a:t>The pencil is heavier than the book</a:t>
             </a:r>
             <a:endParaRPr lang="en-US" sz="1500" dirty="0"/>
           </a:p>
@@ -4628,7 +3230,7 @@
                 <a:ea typeface="Arial" pitchFamily="34" charset="-122"/>
                 <a:cs typeface="Arial" pitchFamily="34" charset="-120"/>
               </a:rPr>
-              <a:t>The pencil pushes with a much bigger force than the book.</a:t>
+              <a:t>The pencil tip pushes with a much bigger force than the book</a:t>
             </a:r>
             <a:endParaRPr lang="en-US" sz="1500" dirty="0"/>
           </a:p>
@@ -4738,7 +3340,7 @@
                 <a:ea typeface="Arial" pitchFamily="34" charset="-122"/>
                 <a:cs typeface="Arial" pitchFamily="34" charset="-120"/>
               </a:rPr>
-              <a:t>QUESTION 3 OF 10</a:t>
+              <a:t>QUESTION 3 OF 8</a:t>
             </a:r>
             <a:endParaRPr lang="en-US" sz="1300" dirty="0"/>
           </a:p>
@@ -4838,7 +3440,7 @@
                 <a:ea typeface="Arial" pitchFamily="34" charset="-122"/>
                 <a:cs typeface="Arial" pitchFamily="34" charset="-120"/>
               </a:rPr>
-              <a:t>A student has a mass of 50 kg (g = 10 N/kg). She stands on one shoe. The shoe tracing on graph paper has an area of 200 cm². Use half her body weight as the force on one foot. What pressure does her shoe exert on the floor?</a:t>
+              <a:t>A student has a mass of 50 kg (g = 10 N/kg). She stands on one shoe whose sole has a contact area of 200 cm². Taking her weight as shared equally between both feet, what pressure does one shoe exert on the floor? (1 m² = 10,000 cm²)</a:t>
             </a:r>
             <a:endParaRPr lang="en-US" sz="1800" dirty="0"/>
           </a:p>
@@ -4938,7 +3540,7 @@
                 <a:ea typeface="Arial" pitchFamily="34" charset="-122"/>
                 <a:cs typeface="Arial" pitchFamily="34" charset="-120"/>
               </a:rPr>
-              <a:t>12 500 Pa</a:t>
+              <a:t>1.25 Pa</a:t>
             </a:r>
             <a:endParaRPr lang="en-US" sz="1700" dirty="0"/>
           </a:p>
@@ -5038,7 +3640,7 @@
                 <a:ea typeface="Arial" pitchFamily="34" charset="-122"/>
                 <a:cs typeface="Arial" pitchFamily="34" charset="-120"/>
               </a:rPr>
-              <a:t>25 000 Pa</a:t>
+              <a:t>25,000 Pa</a:t>
             </a:r>
             <a:endParaRPr lang="en-US" sz="1700" dirty="0"/>
           </a:p>
@@ -5138,7 +3740,7 @@
                 <a:ea typeface="Arial" pitchFamily="34" charset="-122"/>
                 <a:cs typeface="Arial" pitchFamily="34" charset="-120"/>
               </a:rPr>
-              <a:t>1.25 Pa</a:t>
+              <a:t>12,500 Pa</a:t>
             </a:r>
             <a:endParaRPr lang="en-US" sz="1700" dirty="0"/>
           </a:p>
@@ -5238,7 +3840,7 @@
                 <a:ea typeface="Arial" pitchFamily="34" charset="-122"/>
                 <a:cs typeface="Arial" pitchFamily="34" charset="-120"/>
               </a:rPr>
-              <a:t>5 Pa</a:t>
+              <a:t>125,000 Pa</a:t>
             </a:r>
             <a:endParaRPr lang="en-US" sz="1700" dirty="0"/>
           </a:p>
@@ -5348,7 +3950,7 @@
                 <a:ea typeface="Arial" pitchFamily="34" charset="-122"/>
                 <a:cs typeface="Arial" pitchFamily="34" charset="-120"/>
               </a:rPr>
-              <a:t>QUESTION 4 OF 10</a:t>
+              <a:t>QUESTION 4 OF 8</a:t>
             </a:r>
             <a:endParaRPr lang="en-US" sz="1300" dirty="0"/>
           </a:p>
@@ -5409,7 +4011,7 @@
                 <a:ea typeface="Arial" pitchFamily="34" charset="-122"/>
                 <a:cs typeface="Arial" pitchFamily="34" charset="-120"/>
               </a:rPr>
-              <a:t>Use after: Observe phase</a:t>
+              <a:t>Use after: Explain phase</a:t>
             </a:r>
             <a:endParaRPr lang="en-US" sz="1100" dirty="0"/>
           </a:p>
@@ -5440,17 +4042,17 @@
               <a:buNone/>
             </a:pPr>
             <a:r>
-              <a:rPr lang="en-US" sz="2000" b="1" dirty="0">
-                <a:solidFill>
-                  <a:srgbClr val="FFFFFF"/>
-                </a:solidFill>
-                <a:latin typeface="Arial" pitchFamily="34" charset="0"/>
-                <a:ea typeface="Arial" pitchFamily="34" charset="-122"/>
-                <a:cs typeface="Arial" pitchFamily="34" charset="-120"/>
-              </a:rPr>
-              <a:t>In the shoe investigation, a pair counts the squares in a shoe tracing and finds an area of 250 cm². To calculate pressure in pascals, they must convert this to m². What is the area in m²?</a:t>
-            </a:r>
-            <a:endParaRPr lang="en-US" sz="2000" dirty="0"/>
+              <a:rPr lang="en-US" sz="2300" b="1" dirty="0">
+                <a:solidFill>
+                  <a:srgbClr val="FFFFFF"/>
+                </a:solidFill>
+                <a:latin typeface="Arial" pitchFamily="34" charset="0"/>
+                <a:ea typeface="Arial" pitchFamily="34" charset="-122"/>
+                <a:cs typeface="Arial" pitchFamily="34" charset="-120"/>
+              </a:rPr>
+              <a:t>Which choice correctly gives the definition of pressure and its SI unit?</a:t>
+            </a:r>
+            <a:endParaRPr lang="en-US" sz="2300" dirty="0"/>
           </a:p>
         </p:txBody>
       </p:sp>
@@ -5548,7 +4150,7 @@
                 <a:ea typeface="Arial" pitchFamily="34" charset="-122"/>
                 <a:cs typeface="Arial" pitchFamily="34" charset="-120"/>
               </a:rPr>
-              <a:t>0.25 m²</a:t>
+              <a:t>Pressure = area ÷ force; unit is the Newton (N)</a:t>
             </a:r>
             <a:endParaRPr lang="en-US" sz="1700" dirty="0"/>
           </a:p>
@@ -5648,7 +4250,7 @@
                 <a:ea typeface="Arial" pitchFamily="34" charset="-122"/>
                 <a:cs typeface="Arial" pitchFamily="34" charset="-120"/>
               </a:rPr>
-              <a:t>0.025 m²</a:t>
+              <a:t>Pressure = mass ÷ area; unit is the kilogram (kg)</a:t>
             </a:r>
             <a:endParaRPr lang="en-US" sz="1700" dirty="0"/>
           </a:p>
@@ -5748,7 +4350,7 @@
                 <a:ea typeface="Arial" pitchFamily="34" charset="-122"/>
                 <a:cs typeface="Arial" pitchFamily="34" charset="-120"/>
               </a:rPr>
-              <a:t>0.0025 m²</a:t>
+              <a:t>Pressure = force × area; unit is the square metre (m²)</a:t>
             </a:r>
             <a:endParaRPr lang="en-US" sz="1700" dirty="0"/>
           </a:p>
@@ -5848,7 +4450,7 @@
                 <a:ea typeface="Arial" pitchFamily="34" charset="-122"/>
                 <a:cs typeface="Arial" pitchFamily="34" charset="-120"/>
               </a:rPr>
-              <a:t>2.5 m²</a:t>
+              <a:t>Pressure = force ÷ area; unit is the Pascal (Pa), which is N/m²</a:t>
             </a:r>
             <a:endParaRPr lang="en-US" sz="1700" dirty="0"/>
           </a:p>
@@ -5958,7 +4560,7 @@
                 <a:ea typeface="Arial" pitchFamily="34" charset="-122"/>
                 <a:cs typeface="Arial" pitchFamily="34" charset="-120"/>
               </a:rPr>
-              <a:t>QUESTION 5 OF 10</a:t>
+              <a:t>QUESTION 5 OF 8</a:t>
             </a:r>
             <a:endParaRPr lang="en-US" sz="1300" dirty="0"/>
           </a:p>
@@ -6050,17 +4652,17 @@
               <a:buNone/>
             </a:pPr>
             <a:r>
-              <a:rPr lang="en-US" sz="2300" b="1" dirty="0">
-                <a:solidFill>
-                  <a:srgbClr val="FFFFFF"/>
-                </a:solidFill>
-                <a:latin typeface="Arial" pitchFamily="34" charset="0"/>
-                <a:ea typeface="Arial" pitchFamily="34" charset="-122"/>
-                <a:cs typeface="Arial" pitchFamily="34" charset="-120"/>
-              </a:rPr>
-              <a:t>Which statement correctly gives the definition of pressure and its SI unit?</a:t>
-            </a:r>
-            <a:endParaRPr lang="en-US" sz="2300" dirty="0"/>
+              <a:rPr lang="en-US" sz="1600" b="1" dirty="0">
+                <a:solidFill>
+                  <a:srgbClr val="FFFFFF"/>
+                </a:solidFill>
+                <a:latin typeface="Arial" pitchFamily="34" charset="0"/>
+                <a:ea typeface="Arial" pitchFamily="34" charset="-122"/>
+                <a:cs typeface="Arial" pitchFamily="34" charset="-120"/>
+              </a:rPr>
+              <a:t>A maize bag of mass 90 kg (g = 10 N/kg) is placed on a wooden pallet in a warehouse in Eldoret. The pallet has 4 legs, each with a base area of 25 cm². The weight is shared equally by the legs. What pressure does each leg exert on the floor? (1 m² = 10,000 cm²)</a:t>
+            </a:r>
+            <a:endParaRPr lang="en-US" sz="1600" dirty="0"/>
           </a:p>
         </p:txBody>
       </p:sp>
@@ -6158,7 +4760,7 @@
                 <a:ea typeface="Arial" pitchFamily="34" charset="-122"/>
                 <a:cs typeface="Arial" pitchFamily="34" charset="-120"/>
               </a:rPr>
-              <a:t>Pressure = force ÷ area, measured in newtons (N)</a:t>
+              <a:t>90,000 Pa</a:t>
             </a:r>
             <a:endParaRPr lang="en-US" sz="1700" dirty="0"/>
           </a:p>
@@ -6258,7 +4860,7 @@
                 <a:ea typeface="Arial" pitchFamily="34" charset="-122"/>
                 <a:cs typeface="Arial" pitchFamily="34" charset="-120"/>
               </a:rPr>
-              <a:t>Pressure = area ÷ force, measured in m²/N</a:t>
+              <a:t>9,000 Pa</a:t>
             </a:r>
             <a:endParaRPr lang="en-US" sz="1700" dirty="0"/>
           </a:p>
@@ -6358,7 +4960,7 @@
                 <a:ea typeface="Arial" pitchFamily="34" charset="-122"/>
                 <a:cs typeface="Arial" pitchFamily="34" charset="-120"/>
               </a:rPr>
-              <a:t>Pressure = force ÷ area, measured in pascals (Pa), where 1 Pa = 1 N/m²</a:t>
+              <a:t>900,000 Pa</a:t>
             </a:r>
             <a:endParaRPr lang="en-US" sz="1700" dirty="0"/>
           </a:p>
@@ -6458,7 +5060,7 @@
                 <a:ea typeface="Arial" pitchFamily="34" charset="-122"/>
                 <a:cs typeface="Arial" pitchFamily="34" charset="-120"/>
               </a:rPr>
-              <a:t>Pressure = force × area, measured in N·m²</a:t>
+              <a:t>360,000 Pa</a:t>
             </a:r>
             <a:endParaRPr lang="en-US" sz="1700" dirty="0"/>
           </a:p>
@@ -6568,7 +5170,7 @@
                 <a:ea typeface="Arial" pitchFamily="34" charset="-122"/>
                 <a:cs typeface="Arial" pitchFamily="34" charset="-120"/>
               </a:rPr>
-              <a:t>QUESTION 6 OF 10</a:t>
+              <a:t>QUESTION 6 OF 8</a:t>
             </a:r>
             <a:endParaRPr lang="en-US" sz="1300" dirty="0"/>
           </a:p>
@@ -6668,7 +5270,7 @@
                 <a:ea typeface="Arial" pitchFamily="34" charset="-122"/>
                 <a:cs typeface="Arial" pitchFamily="34" charset="-120"/>
               </a:rPr>
-              <a:t>A maize bag of mass 90 kg (g = 10 N/kg) is placed on a wooden pallet with 4 legs. Each leg has a base area of 25 cm². The weight is shared equally by the legs. What pressure does each leg exert on the warehouse floor in Eldoret?</a:t>
+              <a:t>A Maasai elder leans on a rungu whose handle tip has an area of 2 cm², with a force of 150 N. A nurse at Kenyatta National Hospital leans on a flat crutch base of area 50 cm² with the same 150 N force. How do the pressures on the floor compare?</a:t>
             </a:r>
             <a:endParaRPr lang="en-US" sz="1800" dirty="0"/>
           </a:p>
@@ -6768,7 +5370,7 @@
                 <a:ea typeface="Arial" pitchFamily="34" charset="-122"/>
                 <a:cs typeface="Arial" pitchFamily="34" charset="-120"/>
               </a:rPr>
-              <a:t>9 Pa</a:t>
+              <a:t>The rungu exerts 48 times more pressure than the crutch</a:t>
             </a:r>
             <a:endParaRPr lang="en-US" sz="1700" dirty="0"/>
           </a:p>
@@ -6868,7 +5470,7 @@
                 <a:ea typeface="Arial" pitchFamily="34" charset="-122"/>
                 <a:cs typeface="Arial" pitchFamily="34" charset="-120"/>
               </a:rPr>
-              <a:t>360 000 Pa</a:t>
+              <a:t>The pressures are equal, because both forces are 150 N</a:t>
             </a:r>
             <a:endParaRPr lang="en-US" sz="1700" dirty="0"/>
           </a:p>
@@ -6968,7 +5570,7 @@
                 <a:ea typeface="Arial" pitchFamily="34" charset="-122"/>
                 <a:cs typeface="Arial" pitchFamily="34" charset="-120"/>
               </a:rPr>
-              <a:t>36 Pa</a:t>
+              <a:t>The rungu exerts 25 times more pressure than the crutch</a:t>
             </a:r>
             <a:endParaRPr lang="en-US" sz="1700" dirty="0"/>
           </a:p>
@@ -7068,7 +5670,7 @@
                 <a:ea typeface="Arial" pitchFamily="34" charset="-122"/>
                 <a:cs typeface="Arial" pitchFamily="34" charset="-120"/>
               </a:rPr>
-              <a:t>90 000 Pa</a:t>
+              <a:t>The crutch exerts 25 times more pressure than the rungu</a:t>
             </a:r>
             <a:endParaRPr lang="en-US" sz="1700" dirty="0"/>
           </a:p>
@@ -7178,7 +5780,7 @@
                 <a:ea typeface="Arial" pitchFamily="34" charset="-122"/>
                 <a:cs typeface="Arial" pitchFamily="34" charset="-120"/>
               </a:rPr>
-              <a:t>QUESTION 7 OF 10</a:t>
+              <a:t>QUESTION 7 OF 8</a:t>
             </a:r>
             <a:endParaRPr lang="en-US" sz="1300" dirty="0"/>
           </a:p>
@@ -7239,7 +5841,7 @@
                 <a:ea typeface="Arial" pitchFamily="34" charset="-122"/>
                 <a:cs typeface="Arial" pitchFamily="34" charset="-120"/>
               </a:rPr>
-              <a:t>Use after: Explain phase</a:t>
+              <a:t>Use after: DQB phase</a:t>
             </a:r>
             <a:endParaRPr lang="en-US" sz="1100" dirty="0"/>
           </a:p>
@@ -7270,17 +5872,17 @@
               <a:buNone/>
             </a:pPr>
             <a:r>
-              <a:rPr lang="en-US" sz="2000" b="1" dirty="0">
-                <a:solidFill>
-                  <a:srgbClr val="FFFFFF"/>
-                </a:solidFill>
-                <a:latin typeface="Arial" pitchFamily="34" charset="0"/>
-                <a:ea typeface="Arial" pitchFamily="34" charset="-122"/>
-                <a:cs typeface="Arial" pitchFamily="34" charset="-120"/>
-              </a:rPr>
-              <a:t>A Maasai elder leans on a rungu with a handle tip area of 2 cm², using a force of 150 N. What pressure does the rungu tip exert on the ground?</a:t>
-            </a:r>
-            <a:endParaRPr lang="en-US" sz="2000" dirty="0"/>
+              <a:rPr lang="en-US" sz="2300" b="1" dirty="0">
+                <a:solidFill>
+                  <a:srgbClr val="FFFFFF"/>
+                </a:solidFill>
+                <a:latin typeface="Arial" pitchFamily="34" charset="0"/>
+                <a:ea typeface="Arial" pitchFamily="34" charset="-122"/>
+                <a:cs typeface="Arial" pitchFamily="34" charset="-120"/>
+              </a:rPr>
+              <a:t>Which statement best describes atmospheric pressure?</a:t>
+            </a:r>
+            <a:endParaRPr lang="en-US" sz="2300" dirty="0"/>
           </a:p>
         </p:txBody>
       </p:sp>
@@ -7370,17 +5972,17 @@
               <a:buNone/>
             </a:pPr>
             <a:r>
-              <a:rPr lang="en-US" sz="1700" dirty="0">
-                <a:solidFill>
-                  <a:srgbClr val="FFFFFF"/>
-                </a:solidFill>
-                <a:latin typeface="Arial" pitchFamily="34" charset="0"/>
-                <a:ea typeface="Arial" pitchFamily="34" charset="-122"/>
-                <a:cs typeface="Arial" pitchFamily="34" charset="-120"/>
-              </a:rPr>
-              <a:t>750 000 Pa</a:t>
-            </a:r>
-            <a:endParaRPr lang="en-US" sz="1700" dirty="0"/>
+              <a:rPr lang="en-US" sz="1500" dirty="0">
+                <a:solidFill>
+                  <a:srgbClr val="FFFFFF"/>
+                </a:solidFill>
+                <a:latin typeface="Arial" pitchFamily="34" charset="0"/>
+                <a:ea typeface="Arial" pitchFamily="34" charset="-122"/>
+                <a:cs typeface="Arial" pitchFamily="34" charset="-120"/>
+              </a:rPr>
+              <a:t>It is a force that acts only downwards on the top of objects</a:t>
+            </a:r>
+            <a:endParaRPr lang="en-US" sz="1500" dirty="0"/>
           </a:p>
         </p:txBody>
       </p:sp>
@@ -7470,17 +6072,17 @@
               <a:buNone/>
             </a:pPr>
             <a:r>
-              <a:rPr lang="en-US" sz="1700" dirty="0">
-                <a:solidFill>
-                  <a:srgbClr val="FFFFFF"/>
-                </a:solidFill>
-                <a:latin typeface="Arial" pitchFamily="34" charset="0"/>
-                <a:ea typeface="Arial" pitchFamily="34" charset="-122"/>
-                <a:cs typeface="Arial" pitchFamily="34" charset="-120"/>
-              </a:rPr>
-              <a:t>75 Pa</a:t>
-            </a:r>
-            <a:endParaRPr lang="en-US" sz="1700" dirty="0"/>
+              <a:rPr lang="en-US" sz="1500" dirty="0">
+                <a:solidFill>
+                  <a:srgbClr val="FFFFFF"/>
+                </a:solidFill>
+                <a:latin typeface="Arial" pitchFamily="34" charset="0"/>
+                <a:ea typeface="Arial" pitchFamily="34" charset="-122"/>
+                <a:cs typeface="Arial" pitchFamily="34" charset="-120"/>
+              </a:rPr>
+              <a:t>It is the weight of the column of air above a surface, and it acts on every exposed face of an object</a:t>
+            </a:r>
+            <a:endParaRPr lang="en-US" sz="1500" dirty="0"/>
           </a:p>
         </p:txBody>
       </p:sp>
@@ -7570,17 +6172,17 @@
               <a:buNone/>
             </a:pPr>
             <a:r>
-              <a:rPr lang="en-US" sz="1700" dirty="0">
-                <a:solidFill>
-                  <a:srgbClr val="FFFFFF"/>
-                </a:solidFill>
-                <a:latin typeface="Arial" pitchFamily="34" charset="0"/>
-                <a:ea typeface="Arial" pitchFamily="34" charset="-122"/>
-                <a:cs typeface="Arial" pitchFamily="34" charset="-120"/>
-              </a:rPr>
-              <a:t>7 500 Pa</a:t>
-            </a:r>
-            <a:endParaRPr lang="en-US" sz="1700" dirty="0"/>
+              <a:rPr lang="en-US" sz="1500" dirty="0">
+                <a:solidFill>
+                  <a:srgbClr val="FFFFFF"/>
+                </a:solidFill>
+                <a:latin typeface="Arial" pitchFamily="34" charset="0"/>
+                <a:ea typeface="Arial" pitchFamily="34" charset="-122"/>
+                <a:cs typeface="Arial" pitchFamily="34" charset="-120"/>
+              </a:rPr>
+              <a:t>It is the force of moving wind, and it acts only in the direction the wind blows</a:t>
+            </a:r>
+            <a:endParaRPr lang="en-US" sz="1500" dirty="0"/>
           </a:p>
         </p:txBody>
       </p:sp>
@@ -7670,17 +6272,17 @@
               <a:buNone/>
             </a:pPr>
             <a:r>
-              <a:rPr lang="en-US" sz="1700" dirty="0">
-                <a:solidFill>
-                  <a:srgbClr val="FFFFFF"/>
-                </a:solidFill>
-                <a:latin typeface="Arial" pitchFamily="34" charset="0"/>
-                <a:ea typeface="Arial" pitchFamily="34" charset="-122"/>
-                <a:cs typeface="Arial" pitchFamily="34" charset="-120"/>
-              </a:rPr>
-              <a:t>30 000 Pa</a:t>
-            </a:r>
-            <a:endParaRPr lang="en-US" sz="1700" dirty="0"/>
+              <a:rPr lang="en-US" sz="1500" dirty="0">
+                <a:solidFill>
+                  <a:srgbClr val="FFFFFF"/>
+                </a:solidFill>
+                <a:latin typeface="Arial" pitchFamily="34" charset="0"/>
+                <a:ea typeface="Arial" pitchFamily="34" charset="-122"/>
+                <a:cs typeface="Arial" pitchFamily="34" charset="-120"/>
+              </a:rPr>
+              <a:t>It is the pressure of the air trapped inside a container only</a:t>
+            </a:r>
+            <a:endParaRPr lang="en-US" sz="1500" dirty="0"/>
           </a:p>
         </p:txBody>
       </p:sp>
@@ -7788,7 +6390,7 @@
                 <a:ea typeface="Arial" pitchFamily="34" charset="-122"/>
                 <a:cs typeface="Arial" pitchFamily="34" charset="-120"/>
               </a:rPr>
-              <a:t>QUESTION 8 OF 10</a:t>
+              <a:t>QUESTION 8 OF 8</a:t>
             </a:r>
             <a:endParaRPr lang="en-US" sz="1300" dirty="0"/>
           </a:p>
@@ -7849,7 +6451,7 @@
                 <a:ea typeface="Arial" pitchFamily="34" charset="-122"/>
                 <a:cs typeface="Arial" pitchFamily="34" charset="-120"/>
               </a:rPr>
-              <a:t>Use after: Explain phase</a:t>
+              <a:t>Use after: Model Building phase</a:t>
             </a:r>
             <a:endParaRPr lang="en-US" sz="1100" dirty="0"/>
           </a:p>
@@ -7888,7 +6490,7 @@
                 <a:ea typeface="Arial" pitchFamily="34" charset="-122"/>
                 <a:cs typeface="Arial" pitchFamily="34" charset="-120"/>
               </a:rPr>
-              <a:t>A rungu tip (area 2 cm²) and a flat crutch base (area 50 cm²) each carry the same force of 150 N. Which is safer on a soft floor, and why?</a:t>
+              <a:t>An empty sealed jerrycan with normal air inside and outside stays intact. After some air is pumped out of it, it collapses. Which explanation is correct?</a:t>
             </a:r>
             <a:endParaRPr lang="en-US" sz="2000" dirty="0"/>
           </a:p>
@@ -7980,17 +6582,17 @@
               <a:buNone/>
             </a:pPr>
             <a:r>
-              <a:rPr lang="en-US" sz="1700" dirty="0">
-                <a:solidFill>
-                  <a:srgbClr val="FFFFFF"/>
-                </a:solidFill>
-                <a:latin typeface="Arial" pitchFamily="34" charset="0"/>
-                <a:ea typeface="Arial" pitchFamily="34" charset="-122"/>
-                <a:cs typeface="Arial" pitchFamily="34" charset="-120"/>
-              </a:rPr>
-              <a:t>The crutch, because a larger area gives a smaller pressure on the floor.</a:t>
-            </a:r>
-            <a:endParaRPr lang="en-US" sz="1700" dirty="0"/>
+              <a:rPr lang="en-US" sz="1300" dirty="0">
+                <a:solidFill>
+                  <a:srgbClr val="FFFFFF"/>
+                </a:solidFill>
+                <a:latin typeface="Arial" pitchFamily="34" charset="0"/>
+                <a:ea typeface="Arial" pitchFamily="34" charset="-122"/>
+                <a:cs typeface="Arial" pitchFamily="34" charset="-120"/>
+              </a:rPr>
+              <a:t>Before, there was no air pushing on the jerrycan at all</a:t>
+            </a:r>
+            <a:endParaRPr lang="en-US" sz="1300" dirty="0"/>
           </a:p>
         </p:txBody>
       </p:sp>
@@ -8080,17 +6682,17 @@
               <a:buNone/>
             </a:pPr>
             <a:r>
-              <a:rPr lang="en-US" sz="1700" dirty="0">
-                <a:solidFill>
-                  <a:srgbClr val="FFFFFF"/>
-                </a:solidFill>
-                <a:latin typeface="Arial" pitchFamily="34" charset="0"/>
-                <a:ea typeface="Arial" pitchFamily="34" charset="-122"/>
-                <a:cs typeface="Arial" pitchFamily="34" charset="-120"/>
-              </a:rPr>
-              <a:t>The rungu, because it spreads the force over more area.</a:t>
-            </a:r>
-            <a:endParaRPr lang="en-US" sz="1700" dirty="0"/>
+              <a:rPr lang="en-US" sz="1300" dirty="0">
+                <a:solidFill>
+                  <a:srgbClr val="FFFFFF"/>
+                </a:solidFill>
+                <a:latin typeface="Arial" pitchFamily="34" charset="0"/>
+                <a:ea typeface="Arial" pitchFamily="34" charset="-122"/>
+                <a:cs typeface="Arial" pitchFamily="34" charset="-120"/>
+              </a:rPr>
+              <a:t>Before, the air pressure inside pushing outwards balanced the air pressure outside pushing inwards; after, the pressure inside was much less, so the outside pressure crushed it</a:t>
+            </a:r>
+            <a:endParaRPr lang="en-US" sz="1300" dirty="0"/>
           </a:p>
         </p:txBody>
       </p:sp>
@@ -8180,17 +6782,17 @@
               <a:buNone/>
             </a:pPr>
             <a:r>
-              <a:rPr lang="en-US" sz="1700" dirty="0">
-                <a:solidFill>
-                  <a:srgbClr val="FFFFFF"/>
-                </a:solidFill>
-                <a:latin typeface="Arial" pitchFamily="34" charset="0"/>
-                <a:ea typeface="Arial" pitchFamily="34" charset="-122"/>
-                <a:cs typeface="Arial" pitchFamily="34" charset="-120"/>
-              </a:rPr>
-              <a:t>The rungu, because a small area gives a smaller pressure.</a:t>
-            </a:r>
-            <a:endParaRPr lang="en-US" sz="1700" dirty="0"/>
+              <a:rPr lang="en-US" sz="1300" dirty="0">
+                <a:solidFill>
+                  <a:srgbClr val="FFFFFF"/>
+                </a:solidFill>
+                <a:latin typeface="Arial" pitchFamily="34" charset="0"/>
+                <a:ea typeface="Arial" pitchFamily="34" charset="-122"/>
+                <a:cs typeface="Arial" pitchFamily="34" charset="-120"/>
+              </a:rPr>
+              <a:t>The air outside became heavier after the air inside was removed</a:t>
+            </a:r>
+            <a:endParaRPr lang="en-US" sz="1300" dirty="0"/>
           </a:p>
         </p:txBody>
       </p:sp>
@@ -8280,17 +6882,17 @@
               <a:buNone/>
             </a:pPr>
             <a:r>
-              <a:rPr lang="en-US" sz="1700" dirty="0">
-                <a:solidFill>
-                  <a:srgbClr val="FFFFFF"/>
-                </a:solidFill>
-                <a:latin typeface="Arial" pitchFamily="34" charset="0"/>
-                <a:ea typeface="Arial" pitchFamily="34" charset="-122"/>
-                <a:cs typeface="Arial" pitchFamily="34" charset="-120"/>
-              </a:rPr>
-              <a:t>Both are equally safe, because the force is the same.</a:t>
-            </a:r>
-            <a:endParaRPr lang="en-US" sz="1700" dirty="0"/>
+              <a:rPr lang="en-US" sz="1300" dirty="0">
+                <a:solidFill>
+                  <a:srgbClr val="FFFFFF"/>
+                </a:solidFill>
+                <a:latin typeface="Arial" pitchFamily="34" charset="0"/>
+                <a:ea typeface="Arial" pitchFamily="34" charset="-122"/>
+                <a:cs typeface="Arial" pitchFamily="34" charset="-120"/>
+              </a:rPr>
+              <a:t>The plastic was already weak and only needed a small push from the pump</a:t>
+            </a:r>
+            <a:endParaRPr lang="en-US" sz="1300" dirty="0"/>
           </a:p>
         </p:txBody>
       </p:sp>

--- a/data/outputs/v2/Physics/SS1.1_Pressure/quiz/Physics_G10_SS1.1_Pressure_L2_QuickCheck.pptx
+++ b/data/outputs/v2/Physics/SS1.1_Pressure/quiz/Physics_G10_SS1.1_Pressure_L2_QuickCheck.pptx
@@ -14,10 +14,9 @@
     <p:sldId id="262" r:id="rId8"/>
     <p:sldId id="263" r:id="rId9"/>
     <p:sldId id="264" r:id="rId10"/>
-    <p:sldId id="265" r:id="rId11"/>
   </p:sldIdLst>
   <p:notesMasterIdLst>
-    <p:notesMasterId r:id="rId12"/>
+    <p:notesMasterId r:id="rId11"/>
   </p:notesMasterIdLst>
   <p:sldSz cx="12192000" cy="6858000"/>
   <p:notesSz cx="6858000" cy="12192000"/>
@@ -535,94 +534,6 @@
             <a:fld id="{F7021451-1387-4CA6-816F-3879F97B5CBC}" type="slidenum">
               <a:rPr lang="en-US"/>
               <a:t>1</a:t>
-            </a:fld>
-            <a:endParaRPr lang="en-US"/>
-          </a:p>
-        </p:txBody>
-      </p:sp>
-    </p:spTree>
-    <p:extLst>
-      <p:ext uri="{BB962C8B-B14F-4D97-AF65-F5344CB8AC3E}">
-        <p14:creationId xmlns:p14="http://schemas.microsoft.com/office/powerpoint/2010/main" val="1024086991"/>
-      </p:ext>
-    </p:extLst>
-  </p:cSld>
-  <p:clrMapOvr>
-    <a:masterClrMapping/>
-  </p:clrMapOvr>
-</p:notes>
-</file>
-
-<file path=ppt/notesSlides/notesSlide10.xml><?xml version="1.0" encoding="utf-8"?>
-<p:notes xmlns:a="http://schemas.openxmlformats.org/drawingml/2006/main" xmlns:r="http://schemas.openxmlformats.org/officeDocument/2006/relationships" xmlns:p="http://schemas.openxmlformats.org/presentationml/2006/main">
-  <p:cSld>
-    <p:spTree>
-      <p:nvGrpSpPr>
-        <p:cNvPr id="1" name=""/>
-        <p:cNvGrpSpPr/>
-        <p:nvPr/>
-      </p:nvGrpSpPr>
-      <p:grpSpPr>
-        <a:xfrm>
-          <a:off x="0" y="0"/>
-          <a:ext cx="0" cy="0"/>
-          <a:chOff x="0" y="0"/>
-          <a:chExt cx="0" cy="0"/>
-        </a:xfrm>
-      </p:grpSpPr>
-      <p:sp>
-        <p:nvSpPr>
-          <p:cNvPr id="2" name="Slide Image Placeholder 1"/>
-          <p:cNvSpPr>
-            <a:spLocks noGrp="1" noRot="1" noChangeAspect="1"/>
-          </p:cNvSpPr>
-          <p:nvPr>
-            <p:ph type="sldImg"/>
-          </p:nvPr>
-        </p:nvSpPr>
-        <p:spPr/>
-      </p:sp>
-      <p:sp>
-        <p:nvSpPr>
-          <p:cNvPr id="3" name="Notes Placeholder 2"/>
-          <p:cNvSpPr>
-            <a:spLocks noGrp="1"/>
-          </p:cNvSpPr>
-          <p:nvPr>
-            <p:ph type="body" idx="1"/>
-          </p:nvPr>
-        </p:nvSpPr>
-        <p:spPr/>
-        <p:txBody>
-          <a:bodyPr/>
-          <a:lstStyle/>
-          <a:p>
-            <a:r>
-              <a:rPr lang="en-US" dirty="0"/>
-              <a:t/>
-            </a:r>
-            <a:endParaRPr lang="en-US" dirty="0"/>
-          </a:p>
-        </p:txBody>
-      </p:sp>
-      <p:sp>
-        <p:nvSpPr>
-          <p:cNvPr id="4" name="Slide Number Placeholder 3"/>
-          <p:cNvSpPr>
-            <a:spLocks noGrp="1"/>
-          </p:cNvSpPr>
-          <p:nvPr>
-            <p:ph type="sldNum" sz="quarter" idx="10"/>
-          </p:nvPr>
-        </p:nvSpPr>
-        <p:spPr/>
-        <p:txBody>
-          <a:bodyPr/>
-          <a:lstStyle/>
-          <a:p>
-            <a:fld id="{F7021451-1387-4CA6-816F-3879F97B5CBC}" type="slidenum">
-              <a:rPr lang="en-US"/>
-              <a:t>10</a:t>
             </a:fld>
             <a:endParaRPr lang="en-US"/>
           </a:p>
@@ -1787,7 +1698,7 @@
                 <a:ea typeface="Arial" pitchFamily="34" charset="-122"/>
                 <a:cs typeface="Arial" pitchFamily="34" charset="-120"/>
               </a:rPr>
-              <a:t>Lesson 2: What Is Pressure? Measuring the Invisible Push — Shoes, Scales, and Force Per Unit Area</a:t>
+              <a:t>Lesson 2: What is Pressure? Force and Area on Flour</a:t>
             </a:r>
             <a:endParaRPr lang="en-US" sz="2000" dirty="0"/>
           </a:p>
@@ -1826,7 +1737,7 @@
                 <a:ea typeface="Arial" pitchFamily="34" charset="-122"/>
                 <a:cs typeface="Arial" pitchFamily="34" charset="-120"/>
               </a:rPr>
-              <a:t>8 multiple-choice questions  •  choose A, B, C or D</a:t>
+              <a:t>7 multiple-choice questions  •  choose A, B, C or D</a:t>
             </a:r>
             <a:endParaRPr lang="en-US" sz="1600" dirty="0"/>
           </a:p>
@@ -1942,116 +1853,6 @@
               <a:t> (https://creativecommons.org/licenses/by-nc/4.0/).</a:t>
             </a:r>
             <a:endParaRPr lang="en-US" sz="900" dirty="0"/>
-          </a:p>
-        </p:txBody>
-      </p:sp>
-    </p:spTree>
-  </p:cSld>
-  <p:clrMapOvr>
-    <a:masterClrMapping/>
-  </p:clrMapOvr>
-</p:sld>
-</file>
-
-<file path=ppt/slides/slide10.xml><?xml version="1.0" encoding="utf-8"?>
-<p:sld xmlns:a="http://schemas.openxmlformats.org/drawingml/2006/main" xmlns:r="http://schemas.openxmlformats.org/officeDocument/2006/relationships" xmlns:p="http://schemas.openxmlformats.org/presentationml/2006/main">
-  <p:cSld name="Slide 10">
-    <p:bg>
-      <p:bgPr>
-        <a:solidFill>
-          <a:srgbClr val="1F3864"/>
-        </a:solidFill>
-      </p:bgPr>
-    </p:bg>
-    <p:spTree>
-      <p:nvGrpSpPr>
-        <p:cNvPr id="1" name=""/>
-        <p:cNvGrpSpPr/>
-        <p:nvPr/>
-      </p:nvGrpSpPr>
-      <p:grpSpPr>
-        <a:xfrm>
-          <a:off x="0" y="0"/>
-          <a:ext cx="0" cy="0"/>
-          <a:chOff x="0" y="0"/>
-          <a:chExt cx="0" cy="0"/>
-        </a:xfrm>
-      </p:grpSpPr>
-      <p:sp>
-        <p:nvSpPr>
-          <p:cNvPr id="2" name="Text 0"/>
-          <p:cNvSpPr/>
-          <p:nvPr/>
-        </p:nvSpPr>
-        <p:spPr>
-          <a:xfrm>
-            <a:off x="731520" y="2194560"/>
-            <a:ext cx="10698480" cy="822960"/>
-          </a:xfrm>
-          <a:prstGeom prst="rect">
-            <a:avLst/>
-          </a:prstGeom>
-          <a:noFill/>
-          <a:ln/>
-        </p:spPr>
-        <p:txBody>
-          <a:bodyPr wrap="square" lIns="0" tIns="0" rIns="0" bIns="0" rtlCol="0" anchor="ctr"/>
-          <a:lstStyle/>
-          <a:p>
-            <a:pPr indent="0" marL="0">
-              <a:buNone/>
-            </a:pPr>
-            <a:r>
-              <a:rPr lang="en-US" sz="3400" b="1" dirty="0">
-                <a:solidFill>
-                  <a:srgbClr val="FFFFFF"/>
-                </a:solidFill>
-                <a:latin typeface="Arial" pitchFamily="34" charset="0"/>
-                <a:ea typeface="Arial" pitchFamily="34" charset="-122"/>
-                <a:cs typeface="Arial" pitchFamily="34" charset="-120"/>
-              </a:rPr>
-              <a:t>All done</a:t>
-            </a:r>
-            <a:endParaRPr lang="en-US" sz="3400" dirty="0"/>
-          </a:p>
-        </p:txBody>
-      </p:sp>
-      <p:sp>
-        <p:nvSpPr>
-          <p:cNvPr id="3" name="Text 1"/>
-          <p:cNvSpPr/>
-          <p:nvPr/>
-        </p:nvSpPr>
-        <p:spPr>
-          <a:xfrm>
-            <a:off x="731520" y="3108960"/>
-            <a:ext cx="10698480" cy="731520"/>
-          </a:xfrm>
-          <a:prstGeom prst="rect">
-            <a:avLst/>
-          </a:prstGeom>
-          <a:noFill/>
-          <a:ln/>
-        </p:spPr>
-        <p:txBody>
-          <a:bodyPr wrap="square" lIns="0" tIns="0" rIns="0" bIns="0" rtlCol="0" anchor="ctr"/>
-          <a:lstStyle/>
-          <a:p>
-            <a:pPr indent="0" marL="0">
-              <a:buNone/>
-            </a:pPr>
-            <a:r>
-              <a:rPr lang="en-US" sz="1800" dirty="0">
-                <a:solidFill>
-                  <a:srgbClr val="D9EEF1"/>
-                </a:solidFill>
-                <a:latin typeface="Arial" pitchFamily="34" charset="0"/>
-                <a:ea typeface="Arial" pitchFamily="34" charset="-122"/>
-                <a:cs typeface="Arial" pitchFamily="34" charset="-120"/>
-              </a:rPr>
-              <a:t>Ask your teacher how to submit your answers today (for example, on a paper answer slip).</a:t>
-            </a:r>
-            <a:endParaRPr lang="en-US" sz="1800" dirty="0"/>
           </a:p>
         </p:txBody>
       </p:sp>
@@ -2120,7 +1921,7 @@
                 <a:ea typeface="Arial" pitchFamily="34" charset="-122"/>
                 <a:cs typeface="Arial" pitchFamily="34" charset="-120"/>
               </a:rPr>
-              <a:t>QUESTION 1 OF 8</a:t>
+              <a:t>QUESTION 1 OF 7</a:t>
             </a:r>
             <a:endParaRPr lang="en-US" sz="1300" dirty="0"/>
           </a:p>
@@ -2220,7 +2021,7 @@
                 <a:ea typeface="Arial" pitchFamily="34" charset="-122"/>
                 <a:cs typeface="Arial" pitchFamily="34" charset="-120"/>
               </a:rPr>
-              <a:t>A sealed empty plastic jerrycan has had some air removed from inside and it is crumpling inwards. Which statement best describes how the air OUTSIDE is acting on it?</a:t>
+              <a:t>A 2 kg brick (weight 20 N) is placed gently on flour, first on its large face and then on its small face. Which statement about the force the brick presses on the flour with is correct?</a:t>
             </a:r>
             <a:endParaRPr lang="en-US" sz="2000" dirty="0"/>
           </a:p>
@@ -2320,7 +2121,7 @@
                 <a:ea typeface="Arial" pitchFamily="34" charset="-122"/>
                 <a:cs typeface="Arial" pitchFamily="34" charset="-120"/>
               </a:rPr>
-              <a:t>It pushes only on the sides, because the top and bottom are flat</a:t>
+              <a:t>The force is greater on the small face because it is narrower.</a:t>
             </a:r>
             <a:endParaRPr lang="en-US" sz="1700" dirty="0"/>
           </a:p>
@@ -2420,7 +2221,7 @@
                 <a:ea typeface="Arial" pitchFamily="34" charset="-122"/>
                 <a:cs typeface="Arial" pitchFamily="34" charset="-120"/>
               </a:rPr>
-              <a:t>It pushes only downwards on the top of the jerrycan</a:t>
+              <a:t>The force is 20 N on both faces because the weight does not change.</a:t>
             </a:r>
             <a:endParaRPr lang="en-US" sz="1700" dirty="0"/>
           </a:p>
@@ -2520,7 +2321,7 @@
                 <a:ea typeface="Arial" pitchFamily="34" charset="-122"/>
                 <a:cs typeface="Arial" pitchFamily="34" charset="-120"/>
               </a:rPr>
-              <a:t>It pushes inwards on every face: top, bottom and all four sides</a:t>
+              <a:t>The force is greater on the large face because it is bigger.</a:t>
             </a:r>
             <a:endParaRPr lang="en-US" sz="1700" dirty="0"/>
           </a:p>
@@ -2620,7 +2421,7 @@
                 <a:ea typeface="Arial" pitchFamily="34" charset="-122"/>
                 <a:cs typeface="Arial" pitchFamily="34" charset="-120"/>
               </a:rPr>
-              <a:t>It does not push at all; the plastic simply becomes weak</a:t>
+              <a:t>The force on the small face is zero because the brick is balanced.</a:t>
             </a:r>
             <a:endParaRPr lang="en-US" sz="1700" dirty="0"/>
           </a:p>
@@ -2730,7 +2531,7 @@
                 <a:ea typeface="Arial" pitchFamily="34" charset="-122"/>
                 <a:cs typeface="Arial" pitchFamily="34" charset="-120"/>
               </a:rPr>
-              <a:t>QUESTION 2 OF 8</a:t>
+              <a:t>QUESTION 2 OF 7</a:t>
             </a:r>
             <a:endParaRPr lang="en-US" sz="1300" dirty="0"/>
           </a:p>
@@ -2830,7 +2631,7 @@
                 <a:ea typeface="Arial" pitchFamily="34" charset="-122"/>
                 <a:cs typeface="Arial" pitchFamily="34" charset="-120"/>
               </a:rPr>
-              <a:t>A teacher presses a flat textbook onto her palm, then presses a sharp pencil tip onto her palm with about the same force. The pencil feels much more painful. What is the best explanation?</a:t>
+              <a:t>The large face of a brick measures 20 cm by 10 cm, so its area is 200 cm2. Given that 1 m2 = 10,000 cm2, what is this area in m2?</a:t>
             </a:r>
             <a:endParaRPr lang="en-US" sz="2000" dirty="0"/>
           </a:p>
@@ -2922,7 +2723,7 @@
               <a:buNone/>
             </a:pPr>
             <a:r>
-              <a:rPr lang="en-US" sz="1500" dirty="0">
+              <a:rPr lang="en-US" sz="1700" dirty="0">
                 <a:solidFill>
                   <a:srgbClr val="FFFFFF"/>
                 </a:solidFill>
@@ -2930,9 +2731,9 @@
                 <a:ea typeface="Arial" pitchFamily="34" charset="-122"/>
                 <a:cs typeface="Arial" pitchFamily="34" charset="-120"/>
               </a:rPr>
-              <a:t>The book has a smaller area, so it spreads the force less</a:t>
-            </a:r>
-            <a:endParaRPr lang="en-US" sz="1500" dirty="0"/>
+              <a:t>0.02 m2</a:t>
+            </a:r>
+            <a:endParaRPr lang="en-US" sz="1700" dirty="0"/>
           </a:p>
         </p:txBody>
       </p:sp>
@@ -3022,7 +2823,7 @@
               <a:buNone/>
             </a:pPr>
             <a:r>
-              <a:rPr lang="en-US" sz="1500" dirty="0">
+              <a:rPr lang="en-US" sz="1700" dirty="0">
                 <a:solidFill>
                   <a:srgbClr val="FFFFFF"/>
                 </a:solidFill>
@@ -3030,9 +2831,9 @@
                 <a:ea typeface="Arial" pitchFamily="34" charset="-122"/>
                 <a:cs typeface="Arial" pitchFamily="34" charset="-120"/>
               </a:rPr>
-              <a:t>The force is about the same, but the pencil tip has a much smaller contact area, so the pressure is greater</a:t>
-            </a:r>
-            <a:endParaRPr lang="en-US" sz="1500" dirty="0"/>
+              <a:t>0.002 m2</a:t>
+            </a:r>
+            <a:endParaRPr lang="en-US" sz="1700" dirty="0"/>
           </a:p>
         </p:txBody>
       </p:sp>
@@ -3122,7 +2923,7 @@
               <a:buNone/>
             </a:pPr>
             <a:r>
-              <a:rPr lang="en-US" sz="1500" dirty="0">
+              <a:rPr lang="en-US" sz="1700" dirty="0">
                 <a:solidFill>
                   <a:srgbClr val="FFFFFF"/>
                 </a:solidFill>
@@ -3130,9 +2931,9 @@
                 <a:ea typeface="Arial" pitchFamily="34" charset="-122"/>
                 <a:cs typeface="Arial" pitchFamily="34" charset="-120"/>
               </a:rPr>
-              <a:t>The pencil is heavier than the book</a:t>
-            </a:r>
-            <a:endParaRPr lang="en-US" sz="1500" dirty="0"/>
+              <a:t>0.2 m2</a:t>
+            </a:r>
+            <a:endParaRPr lang="en-US" sz="1700" dirty="0"/>
           </a:p>
         </p:txBody>
       </p:sp>
@@ -3222,7 +3023,7 @@
               <a:buNone/>
             </a:pPr>
             <a:r>
-              <a:rPr lang="en-US" sz="1500" dirty="0">
+              <a:rPr lang="en-US" sz="1700" dirty="0">
                 <a:solidFill>
                   <a:srgbClr val="FFFFFF"/>
                 </a:solidFill>
@@ -3230,9 +3031,9 @@
                 <a:ea typeface="Arial" pitchFamily="34" charset="-122"/>
                 <a:cs typeface="Arial" pitchFamily="34" charset="-120"/>
               </a:rPr>
-              <a:t>The pencil tip pushes with a much bigger force than the book</a:t>
-            </a:r>
-            <a:endParaRPr lang="en-US" sz="1500" dirty="0"/>
+              <a:t>2 m2</a:t>
+            </a:r>
+            <a:endParaRPr lang="en-US" sz="1700" dirty="0"/>
           </a:p>
         </p:txBody>
       </p:sp>
@@ -3340,7 +3141,7 @@
                 <a:ea typeface="Arial" pitchFamily="34" charset="-122"/>
                 <a:cs typeface="Arial" pitchFamily="34" charset="-120"/>
               </a:rPr>
-              <a:t>QUESTION 3 OF 8</a:t>
+              <a:t>QUESTION 3 OF 7</a:t>
             </a:r>
             <a:endParaRPr lang="en-US" sz="1300" dirty="0"/>
           </a:p>
@@ -3432,7 +3233,7 @@
               <a:buNone/>
             </a:pPr>
             <a:r>
-              <a:rPr lang="en-US" sz="1800" b="1" dirty="0">
+              <a:rPr lang="en-US" sz="2000" b="1" dirty="0">
                 <a:solidFill>
                   <a:srgbClr val="FFFFFF"/>
                 </a:solidFill>
@@ -3440,9 +3241,9 @@
                 <a:ea typeface="Arial" pitchFamily="34" charset="-122"/>
                 <a:cs typeface="Arial" pitchFamily="34" charset="-120"/>
               </a:rPr>
-              <a:t>A student has a mass of 50 kg (g = 10 N/kg). She stands on one shoe whose sole has a contact area of 200 cm². Taking her weight as shared equally between both feet, what pressure does one shoe exert on the floor? (1 m² = 10,000 cm²)</a:t>
-            </a:r>
-            <a:endParaRPr lang="en-US" sz="1800" dirty="0"/>
+              <a:t>A 2 kg brick (g = 10 N/kg) rests on its small face, which has an area of 0.005 m2. What pressure does it exert on the flour?</a:t>
+            </a:r>
+            <a:endParaRPr lang="en-US" sz="2000" dirty="0"/>
           </a:p>
         </p:txBody>
       </p:sp>
@@ -3540,7 +3341,7 @@
                 <a:ea typeface="Arial" pitchFamily="34" charset="-122"/>
                 <a:cs typeface="Arial" pitchFamily="34" charset="-120"/>
               </a:rPr>
-              <a:t>1.25 Pa</a:t>
+              <a:t>4,000 Pa</a:t>
             </a:r>
             <a:endParaRPr lang="en-US" sz="1700" dirty="0"/>
           </a:p>
@@ -3640,7 +3441,7 @@
                 <a:ea typeface="Arial" pitchFamily="34" charset="-122"/>
                 <a:cs typeface="Arial" pitchFamily="34" charset="-120"/>
               </a:rPr>
-              <a:t>25,000 Pa</a:t>
+              <a:t>1,000 Pa</a:t>
             </a:r>
             <a:endParaRPr lang="en-US" sz="1700" dirty="0"/>
           </a:p>
@@ -3740,7 +3541,7 @@
                 <a:ea typeface="Arial" pitchFamily="34" charset="-122"/>
                 <a:cs typeface="Arial" pitchFamily="34" charset="-120"/>
               </a:rPr>
-              <a:t>12,500 Pa</a:t>
+              <a:t>0.1 Pa</a:t>
             </a:r>
             <a:endParaRPr lang="en-US" sz="1700" dirty="0"/>
           </a:p>
@@ -3840,7 +3641,7 @@
                 <a:ea typeface="Arial" pitchFamily="34" charset="-122"/>
                 <a:cs typeface="Arial" pitchFamily="34" charset="-120"/>
               </a:rPr>
-              <a:t>125,000 Pa</a:t>
+              <a:t>0.00025 Pa</a:t>
             </a:r>
             <a:endParaRPr lang="en-US" sz="1700" dirty="0"/>
           </a:p>
@@ -3950,7 +3751,7 @@
                 <a:ea typeface="Arial" pitchFamily="34" charset="-122"/>
                 <a:cs typeface="Arial" pitchFamily="34" charset="-120"/>
               </a:rPr>
-              <a:t>QUESTION 4 OF 8</a:t>
+              <a:t>QUESTION 4 OF 7</a:t>
             </a:r>
             <a:endParaRPr lang="en-US" sz="1300" dirty="0"/>
           </a:p>
@@ -4042,7 +3843,7 @@
               <a:buNone/>
             </a:pPr>
             <a:r>
-              <a:rPr lang="en-US" sz="2300" b="1" dirty="0">
+              <a:rPr lang="en-US" sz="2000" b="1" dirty="0">
                 <a:solidFill>
                   <a:srgbClr val="FFFFFF"/>
                 </a:solidFill>
@@ -4050,9 +3851,9 @@
                 <a:ea typeface="Arial" pitchFamily="34" charset="-122"/>
                 <a:cs typeface="Arial" pitchFamily="34" charset="-120"/>
               </a:rPr>
-              <a:t>Which choice correctly gives the definition of pressure and its SI unit?</a:t>
-            </a:r>
-            <a:endParaRPr lang="en-US" sz="2300" dirty="0"/>
+              <a:t>The same brick of weight 20 N makes the deepest dent in flour when it rests on its small face. What is the best explanation?</a:t>
+            </a:r>
+            <a:endParaRPr lang="en-US" sz="2000" dirty="0"/>
           </a:p>
         </p:txBody>
       </p:sp>
@@ -4150,7 +3951,7 @@
                 <a:ea typeface="Arial" pitchFamily="34" charset="-122"/>
                 <a:cs typeface="Arial" pitchFamily="34" charset="-120"/>
               </a:rPr>
-              <a:t>Pressure = area ÷ force; unit is the Newton (N)</a:t>
+              <a:t>The small face makes the brick heavier.</a:t>
             </a:r>
             <a:endParaRPr lang="en-US" sz="1700" dirty="0"/>
           </a:p>
@@ -4250,7 +4051,7 @@
                 <a:ea typeface="Arial" pitchFamily="34" charset="-122"/>
                 <a:cs typeface="Arial" pitchFamily="34" charset="-120"/>
               </a:rPr>
-              <a:t>Pressure = mass ÷ area; unit is the kilogram (kg)</a:t>
+              <a:t>The small face pushes with a bigger force than the large face.</a:t>
             </a:r>
             <a:endParaRPr lang="en-US" sz="1700" dirty="0"/>
           </a:p>
@@ -4350,7 +4151,7 @@
                 <a:ea typeface="Arial" pitchFamily="34" charset="-122"/>
                 <a:cs typeface="Arial" pitchFamily="34" charset="-120"/>
               </a:rPr>
-              <a:t>Pressure = force × area; unit is the square metre (m²)</a:t>
+              <a:t>The same 20 N is spread over a smaller area, so the pressure is greater.</a:t>
             </a:r>
             <a:endParaRPr lang="en-US" sz="1700" dirty="0"/>
           </a:p>
@@ -4450,7 +4251,7 @@
                 <a:ea typeface="Arial" pitchFamily="34" charset="-122"/>
                 <a:cs typeface="Arial" pitchFamily="34" charset="-120"/>
               </a:rPr>
-              <a:t>Pressure = force ÷ area; unit is the Pascal (Pa), which is N/m²</a:t>
+              <a:t>Force and pressure are the same thing, so the dent depends only on the force.</a:t>
             </a:r>
             <a:endParaRPr lang="en-US" sz="1700" dirty="0"/>
           </a:p>
@@ -4560,7 +4361,7 @@
                 <a:ea typeface="Arial" pitchFamily="34" charset="-122"/>
                 <a:cs typeface="Arial" pitchFamily="34" charset="-120"/>
               </a:rPr>
-              <a:t>QUESTION 5 OF 8</a:t>
+              <a:t>QUESTION 5 OF 7</a:t>
             </a:r>
             <a:endParaRPr lang="en-US" sz="1300" dirty="0"/>
           </a:p>
@@ -4652,7 +4453,7 @@
               <a:buNone/>
             </a:pPr>
             <a:r>
-              <a:rPr lang="en-US" sz="1600" b="1" dirty="0">
+              <a:rPr lang="en-US" sz="2300" b="1" dirty="0">
                 <a:solidFill>
                   <a:srgbClr val="FFFFFF"/>
                 </a:solidFill>
@@ -4660,9 +4461,9 @@
                 <a:ea typeface="Arial" pitchFamily="34" charset="-122"/>
                 <a:cs typeface="Arial" pitchFamily="34" charset="-120"/>
               </a:rPr>
-              <a:t>A maize bag of mass 90 kg (g = 10 N/kg) is placed on a wooden pallet in a warehouse in Eldoret. The pallet has 4 legs, each with a base area of 25 cm². The weight is shared equally by the legs. What pressure does each leg exert on the floor? (1 m² = 10,000 cm²)</a:t>
-            </a:r>
-            <a:endParaRPr lang="en-US" sz="1600" dirty="0"/>
+              <a:t>A force of 30 N acts at right angles on a surface of area 0.5 m2. What is the pressure on the surface?</a:t>
+            </a:r>
+            <a:endParaRPr lang="en-US" sz="2300" dirty="0"/>
           </a:p>
         </p:txBody>
       </p:sp>
@@ -4760,7 +4561,7 @@
                 <a:ea typeface="Arial" pitchFamily="34" charset="-122"/>
                 <a:cs typeface="Arial" pitchFamily="34" charset="-120"/>
               </a:rPr>
-              <a:t>90,000 Pa</a:t>
+              <a:t>0.017 Pa</a:t>
             </a:r>
             <a:endParaRPr lang="en-US" sz="1700" dirty="0"/>
           </a:p>
@@ -4860,7 +4661,7 @@
                 <a:ea typeface="Arial" pitchFamily="34" charset="-122"/>
                 <a:cs typeface="Arial" pitchFamily="34" charset="-120"/>
               </a:rPr>
-              <a:t>9,000 Pa</a:t>
+              <a:t>30 Pa</a:t>
             </a:r>
             <a:endParaRPr lang="en-US" sz="1700" dirty="0"/>
           </a:p>
@@ -4960,7 +4761,7 @@
                 <a:ea typeface="Arial" pitchFamily="34" charset="-122"/>
                 <a:cs typeface="Arial" pitchFamily="34" charset="-120"/>
               </a:rPr>
-              <a:t>900,000 Pa</a:t>
+              <a:t>60 Pa</a:t>
             </a:r>
             <a:endParaRPr lang="en-US" sz="1700" dirty="0"/>
           </a:p>
@@ -5060,7 +4861,7 @@
                 <a:ea typeface="Arial" pitchFamily="34" charset="-122"/>
                 <a:cs typeface="Arial" pitchFamily="34" charset="-120"/>
               </a:rPr>
-              <a:t>360,000 Pa</a:t>
+              <a:t>15 Pa</a:t>
             </a:r>
             <a:endParaRPr lang="en-US" sz="1700" dirty="0"/>
           </a:p>
@@ -5170,7 +4971,7 @@
                 <a:ea typeface="Arial" pitchFamily="34" charset="-122"/>
                 <a:cs typeface="Arial" pitchFamily="34" charset="-120"/>
               </a:rPr>
-              <a:t>QUESTION 6 OF 8</a:t>
+              <a:t>QUESTION 6 OF 7</a:t>
             </a:r>
             <a:endParaRPr lang="en-US" sz="1300" dirty="0"/>
           </a:p>
@@ -5262,7 +5063,7 @@
               <a:buNone/>
             </a:pPr>
             <a:r>
-              <a:rPr lang="en-US" sz="1800" b="1" dirty="0">
+              <a:rPr lang="en-US" sz="2300" b="1" dirty="0">
                 <a:solidFill>
                   <a:srgbClr val="FFFFFF"/>
                 </a:solidFill>
@@ -5270,9 +5071,9 @@
                 <a:ea typeface="Arial" pitchFamily="34" charset="-122"/>
                 <a:cs typeface="Arial" pitchFamily="34" charset="-120"/>
               </a:rPr>
-              <a:t>A Maasai elder leans on a rungu whose handle tip has an area of 2 cm², with a force of 150 N. A nurse at Kenyatta National Hospital leans on a flat crutch base of area 50 cm² with the same 150 N force. How do the pressures on the floor compare?</a:t>
-            </a:r>
-            <a:endParaRPr lang="en-US" sz="1800" dirty="0"/>
+              <a:t>Which statement correctly defines pressure and its unit?</a:t>
+            </a:r>
+            <a:endParaRPr lang="en-US" sz="2300" dirty="0"/>
           </a:p>
         </p:txBody>
       </p:sp>
@@ -5362,7 +5163,7 @@
               <a:buNone/>
             </a:pPr>
             <a:r>
-              <a:rPr lang="en-US" sz="1700" dirty="0">
+              <a:rPr lang="en-US" sz="1500" dirty="0">
                 <a:solidFill>
                   <a:srgbClr val="FFFFFF"/>
                 </a:solidFill>
@@ -5370,9 +5171,9 @@
                 <a:ea typeface="Arial" pitchFamily="34" charset="-122"/>
                 <a:cs typeface="Arial" pitchFamily="34" charset="-120"/>
               </a:rPr>
-              <a:t>The rungu exerts 48 times more pressure than the crutch</a:t>
-            </a:r>
-            <a:endParaRPr lang="en-US" sz="1700" dirty="0"/>
+              <a:t>Pressure is the force multiplied by the area, measured in pascals.</a:t>
+            </a:r>
+            <a:endParaRPr lang="en-US" sz="1500" dirty="0"/>
           </a:p>
         </p:txBody>
       </p:sp>
@@ -5462,7 +5263,7 @@
               <a:buNone/>
             </a:pPr>
             <a:r>
-              <a:rPr lang="en-US" sz="1700" dirty="0">
+              <a:rPr lang="en-US" sz="1500" dirty="0">
                 <a:solidFill>
                   <a:srgbClr val="FFFFFF"/>
                 </a:solidFill>
@@ -5470,9 +5271,9 @@
                 <a:ea typeface="Arial" pitchFamily="34" charset="-122"/>
                 <a:cs typeface="Arial" pitchFamily="34" charset="-120"/>
               </a:rPr>
-              <a:t>The pressures are equal, because both forces are 150 N</a:t>
-            </a:r>
-            <a:endParaRPr lang="en-US" sz="1700" dirty="0"/>
+              <a:t>Pressure is the total force on a surface, measured in newtons.</a:t>
+            </a:r>
+            <a:endParaRPr lang="en-US" sz="1500" dirty="0"/>
           </a:p>
         </p:txBody>
       </p:sp>
@@ -5562,7 +5363,7 @@
               <a:buNone/>
             </a:pPr>
             <a:r>
-              <a:rPr lang="en-US" sz="1700" dirty="0">
+              <a:rPr lang="en-US" sz="1500" dirty="0">
                 <a:solidFill>
                   <a:srgbClr val="FFFFFF"/>
                 </a:solidFill>
@@ -5570,9 +5371,9 @@
                 <a:ea typeface="Arial" pitchFamily="34" charset="-122"/>
                 <a:cs typeface="Arial" pitchFamily="34" charset="-120"/>
               </a:rPr>
-              <a:t>The rungu exerts 25 times more pressure than the crutch</a:t>
-            </a:r>
-            <a:endParaRPr lang="en-US" sz="1700" dirty="0"/>
+              <a:t>Pressure is the mass of an object, measured in kilograms.</a:t>
+            </a:r>
+            <a:endParaRPr lang="en-US" sz="1500" dirty="0"/>
           </a:p>
         </p:txBody>
       </p:sp>
@@ -5662,7 +5463,7 @@
               <a:buNone/>
             </a:pPr>
             <a:r>
-              <a:rPr lang="en-US" sz="1700" dirty="0">
+              <a:rPr lang="en-US" sz="1500" dirty="0">
                 <a:solidFill>
                   <a:srgbClr val="FFFFFF"/>
                 </a:solidFill>
@@ -5670,9 +5471,9 @@
                 <a:ea typeface="Arial" pitchFamily="34" charset="-122"/>
                 <a:cs typeface="Arial" pitchFamily="34" charset="-120"/>
               </a:rPr>
-              <a:t>The crutch exerts 25 times more pressure than the rungu</a:t>
-            </a:r>
-            <a:endParaRPr lang="en-US" sz="1700" dirty="0"/>
+              <a:t>Pressure is the force acting at right angles per unit area, measured in pascals where 1 Pa = 1 N/m2.</a:t>
+            </a:r>
+            <a:endParaRPr lang="en-US" sz="1500" dirty="0"/>
           </a:p>
         </p:txBody>
       </p:sp>
@@ -5780,7 +5581,7 @@
                 <a:ea typeface="Arial" pitchFamily="34" charset="-122"/>
                 <a:cs typeface="Arial" pitchFamily="34" charset="-120"/>
               </a:rPr>
-              <a:t>QUESTION 7 OF 8</a:t>
+              <a:t>QUESTION 7 OF 7</a:t>
             </a:r>
             <a:endParaRPr lang="en-US" sz="1300" dirty="0"/>
           </a:p>
@@ -5841,7 +5642,7 @@
                 <a:ea typeface="Arial" pitchFamily="34" charset="-122"/>
                 <a:cs typeface="Arial" pitchFamily="34" charset="-120"/>
               </a:rPr>
-              <a:t>Use after: DQB phase</a:t>
+              <a:t>Use after: Model Building phase</a:t>
             </a:r>
             <a:endParaRPr lang="en-US" sz="1100" dirty="0"/>
           </a:p>
@@ -5872,7 +5673,7 @@
               <a:buNone/>
             </a:pPr>
             <a:r>
-              <a:rPr lang="en-US" sz="2300" b="1" dirty="0">
+              <a:rPr lang="en-US" sz="1800" b="1" dirty="0">
                 <a:solidFill>
                   <a:srgbClr val="FFFFFF"/>
                 </a:solidFill>
@@ -5880,9 +5681,9 @@
                 <a:ea typeface="Arial" pitchFamily="34" charset="-122"/>
                 <a:cs typeface="Arial" pitchFamily="34" charset="-120"/>
               </a:rPr>
-              <a:t>Which statement best describes atmospheric pressure?</a:t>
-            </a:r>
-            <a:endParaRPr lang="en-US" sz="2300" dirty="0"/>
+              <a:t>Mama Wanjiru pushes with the same 40 N force on a sharp knife and on a blunt knife. The sharp knife cuts a tomato easily. Using what you learnt from the brick on flour, what is the best explanation?</a:t>
+            </a:r>
+            <a:endParaRPr lang="en-US" sz="1800" dirty="0"/>
           </a:p>
         </p:txBody>
       </p:sp>
@@ -5980,7 +5781,7 @@
                 <a:ea typeface="Arial" pitchFamily="34" charset="-122"/>
                 <a:cs typeface="Arial" pitchFamily="34" charset="-120"/>
               </a:rPr>
-              <a:t>It is a force that acts only downwards on the top of objects</a:t>
+              <a:t>The pressure is the same for both knives because the force is the same.</a:t>
             </a:r>
             <a:endParaRPr lang="en-US" sz="1500" dirty="0"/>
           </a:p>
@@ -6080,7 +5881,7 @@
                 <a:ea typeface="Arial" pitchFamily="34" charset="-122"/>
                 <a:cs typeface="Arial" pitchFamily="34" charset="-120"/>
               </a:rPr>
-              <a:t>It is the weight of the column of air above a surface, and it acts on every exposed face of an object</a:t>
+              <a:t>The sharp knife has a bigger force on the tomato than the blunt knife.</a:t>
             </a:r>
             <a:endParaRPr lang="en-US" sz="1500" dirty="0"/>
           </a:p>
@@ -6180,7 +5981,7 @@
                 <a:ea typeface="Arial" pitchFamily="34" charset="-122"/>
                 <a:cs typeface="Arial" pitchFamily="34" charset="-120"/>
               </a:rPr>
-              <a:t>It is the force of moving wind, and it acts only in the direction the wind blows</a:t>
+              <a:t>The sharp knife has a larger contact area, so it cuts better.</a:t>
             </a:r>
             <a:endParaRPr lang="en-US" sz="1500" dirty="0"/>
           </a:p>
@@ -6280,7 +6081,7 @@
                 <a:ea typeface="Arial" pitchFamily="34" charset="-122"/>
                 <a:cs typeface="Arial" pitchFamily="34" charset="-120"/>
               </a:rPr>
-              <a:t>It is the pressure of the air trapped inside a container only</a:t>
+              <a:t>The sharp edge has a much smaller contact area, so the same force gives a greater pressure.</a:t>
             </a:r>
             <a:endParaRPr lang="en-US" sz="1500" dirty="0"/>
           </a:p>
@@ -6339,7 +6140,7 @@
     <p:bg>
       <p:bgPr>
         <a:solidFill>
-          <a:srgbClr val="6A4C93"/>
+          <a:srgbClr val="1F3864"/>
         </a:solidFill>
       </p:bgPr>
     </p:bg>
@@ -6365,124 +6166,24 @@
         </p:nvSpPr>
         <p:spPr>
           <a:xfrm>
-            <a:off x="548640" y="365760"/>
-            <a:ext cx="6400800" cy="365760"/>
-          </a:xfrm>
-          <a:prstGeom prst="rect">
-            <a:avLst/>
-          </a:prstGeom>
-          <a:noFill/>
-          <a:ln/>
-        </p:spPr>
-        <p:txBody>
-          <a:bodyPr wrap="square" lIns="0" tIns="0" rIns="0" bIns="0" rtlCol="0" anchor="ctr"/>
-          <a:lstStyle/>
-          <a:p>
-            <a:pPr indent="0" marL="0">
-              <a:buNone/>
-            </a:pPr>
-            <a:r>
-              <a:rPr lang="en-US" sz="1300" b="1" spc="200" kern="0" dirty="0">
-                <a:solidFill>
-                  <a:srgbClr val="E0D6F0"/>
-                </a:solidFill>
-                <a:latin typeface="Arial" pitchFamily="34" charset="0"/>
-                <a:ea typeface="Arial" pitchFamily="34" charset="-122"/>
-                <a:cs typeface="Arial" pitchFamily="34" charset="-120"/>
-              </a:rPr>
-              <a:t>QUESTION 8 OF 8</a:t>
-            </a:r>
-            <a:endParaRPr lang="en-US" sz="1300" dirty="0"/>
-          </a:p>
-        </p:txBody>
-      </p:sp>
-      <p:sp>
-        <p:nvSpPr>
-          <p:cNvPr id="3" name="Shape 1"/>
-          <p:cNvSpPr/>
-          <p:nvPr/>
-        </p:nvSpPr>
-        <p:spPr>
-          <a:xfrm>
-            <a:off x="8138160" y="320040"/>
-            <a:ext cx="3474720" cy="365760"/>
-          </a:xfrm>
-          <a:prstGeom prst="roundRect">
-            <a:avLst>
-              <a:gd name="adj" fmla="val 15000"/>
-            </a:avLst>
-          </a:prstGeom>
-          <a:solidFill>
-            <a:srgbClr val="5A3F80"/>
-          </a:solidFill>
-          <a:ln/>
-        </p:spPr>
-      </p:sp>
-      <p:sp>
-        <p:nvSpPr>
-          <p:cNvPr id="4" name="Text 2"/>
-          <p:cNvSpPr/>
-          <p:nvPr/>
-        </p:nvSpPr>
-        <p:spPr>
-          <a:xfrm>
-            <a:off x="8138160" y="320040"/>
-            <a:ext cx="3474720" cy="365760"/>
-          </a:xfrm>
-          <a:prstGeom prst="rect">
-            <a:avLst/>
-          </a:prstGeom>
-          <a:noFill/>
-          <a:ln/>
-        </p:spPr>
-        <p:txBody>
-          <a:bodyPr wrap="square" lIns="0" tIns="0" rIns="0" bIns="0" rtlCol="0" anchor="ctr"/>
-          <a:lstStyle/>
-          <a:p>
-            <a:pPr algn="ctr" indent="0" marL="0">
-              <a:buNone/>
-            </a:pPr>
-            <a:r>
-              <a:rPr lang="en-US" sz="1100" i="1" dirty="0">
-                <a:solidFill>
-                  <a:srgbClr val="E0D6F0"/>
-                </a:solidFill>
-                <a:latin typeface="Arial" pitchFamily="34" charset="0"/>
-                <a:ea typeface="Arial" pitchFamily="34" charset="-122"/>
-                <a:cs typeface="Arial" pitchFamily="34" charset="-120"/>
-              </a:rPr>
-              <a:t>Use after: Model Building phase</a:t>
-            </a:r>
-            <a:endParaRPr lang="en-US" sz="1100" dirty="0"/>
-          </a:p>
-        </p:txBody>
-      </p:sp>
-      <p:sp>
-        <p:nvSpPr>
-          <p:cNvPr id="5" name="Text 3"/>
-          <p:cNvSpPr/>
-          <p:nvPr/>
-        </p:nvSpPr>
-        <p:spPr>
-          <a:xfrm>
-            <a:off x="548640" y="868680"/>
-            <a:ext cx="11064240" cy="1325880"/>
-          </a:xfrm>
-          <a:prstGeom prst="rect">
-            <a:avLst/>
-          </a:prstGeom>
-          <a:noFill/>
-          <a:ln/>
-        </p:spPr>
-        <p:txBody>
-          <a:bodyPr wrap="square" lIns="0" tIns="0" rIns="0" bIns="0" rtlCol="0" anchor="ctr"/>
-          <a:lstStyle/>
-          <a:p>
-            <a:pPr indent="0" marL="0">
-              <a:buNone/>
-            </a:pPr>
-            <a:r>
-              <a:rPr lang="en-US" sz="2000" b="1" dirty="0">
+            <a:off x="731520" y="2194560"/>
+            <a:ext cx="10698480" cy="822960"/>
+          </a:xfrm>
+          <a:prstGeom prst="rect">
+            <a:avLst/>
+          </a:prstGeom>
+          <a:noFill/>
+          <a:ln/>
+        </p:spPr>
+        <p:txBody>
+          <a:bodyPr wrap="square" lIns="0" tIns="0" rIns="0" bIns="0" rtlCol="0" anchor="ctr"/>
+          <a:lstStyle/>
+          <a:p>
+            <a:pPr indent="0" marL="0">
+              <a:buNone/>
+            </a:pPr>
+            <a:r>
+              <a:rPr lang="en-US" sz="3400" b="1" dirty="0">
                 <a:solidFill>
                   <a:srgbClr val="FFFFFF"/>
                 </a:solidFill>
@@ -6490,448 +6191,48 @@
                 <a:ea typeface="Arial" pitchFamily="34" charset="-122"/>
                 <a:cs typeface="Arial" pitchFamily="34" charset="-120"/>
               </a:rPr>
-              <a:t>An empty sealed jerrycan with normal air inside and outside stays intact. After some air is pumped out of it, it collapses. Which explanation is correct?</a:t>
-            </a:r>
-            <a:endParaRPr lang="en-US" sz="2000" dirty="0"/>
-          </a:p>
-        </p:txBody>
-      </p:sp>
-      <p:sp>
-        <p:nvSpPr>
-          <p:cNvPr id="6" name="Shape 4"/>
-          <p:cNvSpPr/>
-          <p:nvPr/>
-        </p:nvSpPr>
-        <p:spPr>
-          <a:xfrm>
-            <a:off x="731520" y="2331720"/>
-            <a:ext cx="10698480" cy="777240"/>
-          </a:xfrm>
-          <a:prstGeom prst="roundRect">
-            <a:avLst>
-              <a:gd name="adj" fmla="val 9412"/>
-            </a:avLst>
-          </a:prstGeom>
-          <a:solidFill>
-            <a:srgbClr val="7C5CAA"/>
-          </a:solidFill>
-          <a:ln/>
-        </p:spPr>
-      </p:sp>
-      <p:sp>
-        <p:nvSpPr>
-          <p:cNvPr id="7" name="Text 5"/>
-          <p:cNvSpPr/>
-          <p:nvPr/>
-        </p:nvSpPr>
-        <p:spPr>
-          <a:xfrm>
-            <a:off x="914400" y="2331720"/>
-            <a:ext cx="548640" cy="777240"/>
-          </a:xfrm>
-          <a:prstGeom prst="rect">
-            <a:avLst/>
-          </a:prstGeom>
-          <a:noFill/>
-          <a:ln/>
-        </p:spPr>
-        <p:txBody>
-          <a:bodyPr wrap="square" lIns="0" tIns="0" rIns="0" bIns="0" rtlCol="0" anchor="ctr"/>
-          <a:lstStyle/>
-          <a:p>
-            <a:pPr indent="0" marL="0">
-              <a:buNone/>
-            </a:pPr>
-            <a:r>
-              <a:rPr lang="en-US" sz="1800" b="1" dirty="0">
-                <a:solidFill>
-                  <a:srgbClr val="FFFFFF"/>
-                </a:solidFill>
-                <a:latin typeface="Arial" pitchFamily="34" charset="0"/>
-                <a:ea typeface="Arial" pitchFamily="34" charset="-122"/>
-                <a:cs typeface="Arial" pitchFamily="34" charset="-120"/>
-              </a:rPr>
-              <a:t>A</a:t>
+              <a:t>All done</a:t>
+            </a:r>
+            <a:endParaRPr lang="en-US" sz="3400" dirty="0"/>
+          </a:p>
+        </p:txBody>
+      </p:sp>
+      <p:sp>
+        <p:nvSpPr>
+          <p:cNvPr id="3" name="Text 1"/>
+          <p:cNvSpPr/>
+          <p:nvPr/>
+        </p:nvSpPr>
+        <p:spPr>
+          <a:xfrm>
+            <a:off x="731520" y="3108960"/>
+            <a:ext cx="10698480" cy="731520"/>
+          </a:xfrm>
+          <a:prstGeom prst="rect">
+            <a:avLst/>
+          </a:prstGeom>
+          <a:noFill/>
+          <a:ln/>
+        </p:spPr>
+        <p:txBody>
+          <a:bodyPr wrap="square" lIns="0" tIns="0" rIns="0" bIns="0" rtlCol="0" anchor="ctr"/>
+          <a:lstStyle/>
+          <a:p>
+            <a:pPr indent="0" marL="0">
+              <a:buNone/>
+            </a:pPr>
+            <a:r>
+              <a:rPr lang="en-US" sz="1800" dirty="0">
+                <a:solidFill>
+                  <a:srgbClr val="D9EEF1"/>
+                </a:solidFill>
+                <a:latin typeface="Arial" pitchFamily="34" charset="0"/>
+                <a:ea typeface="Arial" pitchFamily="34" charset="-122"/>
+                <a:cs typeface="Arial" pitchFamily="34" charset="-120"/>
+              </a:rPr>
+              <a:t>Ask your teacher how to submit your answers today (for example, on a paper answer slip).</a:t>
             </a:r>
             <a:endParaRPr lang="en-US" sz="1800" dirty="0"/>
-          </a:p>
-        </p:txBody>
-      </p:sp>
-      <p:sp>
-        <p:nvSpPr>
-          <p:cNvPr id="8" name="Text 6"/>
-          <p:cNvSpPr/>
-          <p:nvPr/>
-        </p:nvSpPr>
-        <p:spPr>
-          <a:xfrm>
-            <a:off x="1554480" y="2331720"/>
-            <a:ext cx="9692640" cy="777240"/>
-          </a:xfrm>
-          <a:prstGeom prst="rect">
-            <a:avLst/>
-          </a:prstGeom>
-          <a:noFill/>
-          <a:ln/>
-        </p:spPr>
-        <p:txBody>
-          <a:bodyPr wrap="square" lIns="0" tIns="0" rIns="0" bIns="0" rtlCol="0" anchor="ctr"/>
-          <a:lstStyle/>
-          <a:p>
-            <a:pPr indent="0" marL="0">
-              <a:buNone/>
-            </a:pPr>
-            <a:r>
-              <a:rPr lang="en-US" sz="1300" dirty="0">
-                <a:solidFill>
-                  <a:srgbClr val="FFFFFF"/>
-                </a:solidFill>
-                <a:latin typeface="Arial" pitchFamily="34" charset="0"/>
-                <a:ea typeface="Arial" pitchFamily="34" charset="-122"/>
-                <a:cs typeface="Arial" pitchFamily="34" charset="-120"/>
-              </a:rPr>
-              <a:t>Before, there was no air pushing on the jerrycan at all</a:t>
-            </a:r>
-            <a:endParaRPr lang="en-US" sz="1300" dirty="0"/>
-          </a:p>
-        </p:txBody>
-      </p:sp>
-      <p:sp>
-        <p:nvSpPr>
-          <p:cNvPr id="9" name="Shape 7"/>
-          <p:cNvSpPr/>
-          <p:nvPr/>
-        </p:nvSpPr>
-        <p:spPr>
-          <a:xfrm>
-            <a:off x="731520" y="3246120"/>
-            <a:ext cx="10698480" cy="777240"/>
-          </a:xfrm>
-          <a:prstGeom prst="roundRect">
-            <a:avLst>
-              <a:gd name="adj" fmla="val 9412"/>
-            </a:avLst>
-          </a:prstGeom>
-          <a:solidFill>
-            <a:srgbClr val="7C5CAA"/>
-          </a:solidFill>
-          <a:ln/>
-        </p:spPr>
-      </p:sp>
-      <p:sp>
-        <p:nvSpPr>
-          <p:cNvPr id="10" name="Text 8"/>
-          <p:cNvSpPr/>
-          <p:nvPr/>
-        </p:nvSpPr>
-        <p:spPr>
-          <a:xfrm>
-            <a:off x="914400" y="3246120"/>
-            <a:ext cx="548640" cy="777240"/>
-          </a:xfrm>
-          <a:prstGeom prst="rect">
-            <a:avLst/>
-          </a:prstGeom>
-          <a:noFill/>
-          <a:ln/>
-        </p:spPr>
-        <p:txBody>
-          <a:bodyPr wrap="square" lIns="0" tIns="0" rIns="0" bIns="0" rtlCol="0" anchor="ctr"/>
-          <a:lstStyle/>
-          <a:p>
-            <a:pPr indent="0" marL="0">
-              <a:buNone/>
-            </a:pPr>
-            <a:r>
-              <a:rPr lang="en-US" sz="1800" b="1" dirty="0">
-                <a:solidFill>
-                  <a:srgbClr val="FFFFFF"/>
-                </a:solidFill>
-                <a:latin typeface="Arial" pitchFamily="34" charset="0"/>
-                <a:ea typeface="Arial" pitchFamily="34" charset="-122"/>
-                <a:cs typeface="Arial" pitchFamily="34" charset="-120"/>
-              </a:rPr>
-              <a:t>B</a:t>
-            </a:r>
-            <a:endParaRPr lang="en-US" sz="1800" dirty="0"/>
-          </a:p>
-        </p:txBody>
-      </p:sp>
-      <p:sp>
-        <p:nvSpPr>
-          <p:cNvPr id="11" name="Text 9"/>
-          <p:cNvSpPr/>
-          <p:nvPr/>
-        </p:nvSpPr>
-        <p:spPr>
-          <a:xfrm>
-            <a:off x="1554480" y="3246120"/>
-            <a:ext cx="9692640" cy="777240"/>
-          </a:xfrm>
-          <a:prstGeom prst="rect">
-            <a:avLst/>
-          </a:prstGeom>
-          <a:noFill/>
-          <a:ln/>
-        </p:spPr>
-        <p:txBody>
-          <a:bodyPr wrap="square" lIns="0" tIns="0" rIns="0" bIns="0" rtlCol="0" anchor="ctr"/>
-          <a:lstStyle/>
-          <a:p>
-            <a:pPr indent="0" marL="0">
-              <a:buNone/>
-            </a:pPr>
-            <a:r>
-              <a:rPr lang="en-US" sz="1300" dirty="0">
-                <a:solidFill>
-                  <a:srgbClr val="FFFFFF"/>
-                </a:solidFill>
-                <a:latin typeface="Arial" pitchFamily="34" charset="0"/>
-                <a:ea typeface="Arial" pitchFamily="34" charset="-122"/>
-                <a:cs typeface="Arial" pitchFamily="34" charset="-120"/>
-              </a:rPr>
-              <a:t>Before, the air pressure inside pushing outwards balanced the air pressure outside pushing inwards; after, the pressure inside was much less, so the outside pressure crushed it</a:t>
-            </a:r>
-            <a:endParaRPr lang="en-US" sz="1300" dirty="0"/>
-          </a:p>
-        </p:txBody>
-      </p:sp>
-      <p:sp>
-        <p:nvSpPr>
-          <p:cNvPr id="12" name="Shape 10"/>
-          <p:cNvSpPr/>
-          <p:nvPr/>
-        </p:nvSpPr>
-        <p:spPr>
-          <a:xfrm>
-            <a:off x="731520" y="4160520"/>
-            <a:ext cx="10698480" cy="777240"/>
-          </a:xfrm>
-          <a:prstGeom prst="roundRect">
-            <a:avLst>
-              <a:gd name="adj" fmla="val 9412"/>
-            </a:avLst>
-          </a:prstGeom>
-          <a:solidFill>
-            <a:srgbClr val="7C5CAA"/>
-          </a:solidFill>
-          <a:ln/>
-        </p:spPr>
-      </p:sp>
-      <p:sp>
-        <p:nvSpPr>
-          <p:cNvPr id="13" name="Text 11"/>
-          <p:cNvSpPr/>
-          <p:nvPr/>
-        </p:nvSpPr>
-        <p:spPr>
-          <a:xfrm>
-            <a:off x="914400" y="4160520"/>
-            <a:ext cx="548640" cy="777240"/>
-          </a:xfrm>
-          <a:prstGeom prst="rect">
-            <a:avLst/>
-          </a:prstGeom>
-          <a:noFill/>
-          <a:ln/>
-        </p:spPr>
-        <p:txBody>
-          <a:bodyPr wrap="square" lIns="0" tIns="0" rIns="0" bIns="0" rtlCol="0" anchor="ctr"/>
-          <a:lstStyle/>
-          <a:p>
-            <a:pPr indent="0" marL="0">
-              <a:buNone/>
-            </a:pPr>
-            <a:r>
-              <a:rPr lang="en-US" sz="1800" b="1" dirty="0">
-                <a:solidFill>
-                  <a:srgbClr val="FFFFFF"/>
-                </a:solidFill>
-                <a:latin typeface="Arial" pitchFamily="34" charset="0"/>
-                <a:ea typeface="Arial" pitchFamily="34" charset="-122"/>
-                <a:cs typeface="Arial" pitchFamily="34" charset="-120"/>
-              </a:rPr>
-              <a:t>C</a:t>
-            </a:r>
-            <a:endParaRPr lang="en-US" sz="1800" dirty="0"/>
-          </a:p>
-        </p:txBody>
-      </p:sp>
-      <p:sp>
-        <p:nvSpPr>
-          <p:cNvPr id="14" name="Text 12"/>
-          <p:cNvSpPr/>
-          <p:nvPr/>
-        </p:nvSpPr>
-        <p:spPr>
-          <a:xfrm>
-            <a:off x="1554480" y="4160520"/>
-            <a:ext cx="9692640" cy="777240"/>
-          </a:xfrm>
-          <a:prstGeom prst="rect">
-            <a:avLst/>
-          </a:prstGeom>
-          <a:noFill/>
-          <a:ln/>
-        </p:spPr>
-        <p:txBody>
-          <a:bodyPr wrap="square" lIns="0" tIns="0" rIns="0" bIns="0" rtlCol="0" anchor="ctr"/>
-          <a:lstStyle/>
-          <a:p>
-            <a:pPr indent="0" marL="0">
-              <a:buNone/>
-            </a:pPr>
-            <a:r>
-              <a:rPr lang="en-US" sz="1300" dirty="0">
-                <a:solidFill>
-                  <a:srgbClr val="FFFFFF"/>
-                </a:solidFill>
-                <a:latin typeface="Arial" pitchFamily="34" charset="0"/>
-                <a:ea typeface="Arial" pitchFamily="34" charset="-122"/>
-                <a:cs typeface="Arial" pitchFamily="34" charset="-120"/>
-              </a:rPr>
-              <a:t>The air outside became heavier after the air inside was removed</a:t>
-            </a:r>
-            <a:endParaRPr lang="en-US" sz="1300" dirty="0"/>
-          </a:p>
-        </p:txBody>
-      </p:sp>
-      <p:sp>
-        <p:nvSpPr>
-          <p:cNvPr id="15" name="Shape 13"/>
-          <p:cNvSpPr/>
-          <p:nvPr/>
-        </p:nvSpPr>
-        <p:spPr>
-          <a:xfrm>
-            <a:off x="731520" y="5074920"/>
-            <a:ext cx="10698480" cy="777240"/>
-          </a:xfrm>
-          <a:prstGeom prst="roundRect">
-            <a:avLst>
-              <a:gd name="adj" fmla="val 9412"/>
-            </a:avLst>
-          </a:prstGeom>
-          <a:solidFill>
-            <a:srgbClr val="7C5CAA"/>
-          </a:solidFill>
-          <a:ln/>
-        </p:spPr>
-      </p:sp>
-      <p:sp>
-        <p:nvSpPr>
-          <p:cNvPr id="16" name="Text 14"/>
-          <p:cNvSpPr/>
-          <p:nvPr/>
-        </p:nvSpPr>
-        <p:spPr>
-          <a:xfrm>
-            <a:off x="914400" y="5074920"/>
-            <a:ext cx="548640" cy="777240"/>
-          </a:xfrm>
-          <a:prstGeom prst="rect">
-            <a:avLst/>
-          </a:prstGeom>
-          <a:noFill/>
-          <a:ln/>
-        </p:spPr>
-        <p:txBody>
-          <a:bodyPr wrap="square" lIns="0" tIns="0" rIns="0" bIns="0" rtlCol="0" anchor="ctr"/>
-          <a:lstStyle/>
-          <a:p>
-            <a:pPr indent="0" marL="0">
-              <a:buNone/>
-            </a:pPr>
-            <a:r>
-              <a:rPr lang="en-US" sz="1800" b="1" dirty="0">
-                <a:solidFill>
-                  <a:srgbClr val="FFFFFF"/>
-                </a:solidFill>
-                <a:latin typeface="Arial" pitchFamily="34" charset="0"/>
-                <a:ea typeface="Arial" pitchFamily="34" charset="-122"/>
-                <a:cs typeface="Arial" pitchFamily="34" charset="-120"/>
-              </a:rPr>
-              <a:t>D</a:t>
-            </a:r>
-            <a:endParaRPr lang="en-US" sz="1800" dirty="0"/>
-          </a:p>
-        </p:txBody>
-      </p:sp>
-      <p:sp>
-        <p:nvSpPr>
-          <p:cNvPr id="17" name="Text 15"/>
-          <p:cNvSpPr/>
-          <p:nvPr/>
-        </p:nvSpPr>
-        <p:spPr>
-          <a:xfrm>
-            <a:off x="1554480" y="5074920"/>
-            <a:ext cx="9692640" cy="777240"/>
-          </a:xfrm>
-          <a:prstGeom prst="rect">
-            <a:avLst/>
-          </a:prstGeom>
-          <a:noFill/>
-          <a:ln/>
-        </p:spPr>
-        <p:txBody>
-          <a:bodyPr wrap="square" lIns="0" tIns="0" rIns="0" bIns="0" rtlCol="0" anchor="ctr"/>
-          <a:lstStyle/>
-          <a:p>
-            <a:pPr indent="0" marL="0">
-              <a:buNone/>
-            </a:pPr>
-            <a:r>
-              <a:rPr lang="en-US" sz="1300" dirty="0">
-                <a:solidFill>
-                  <a:srgbClr val="FFFFFF"/>
-                </a:solidFill>
-                <a:latin typeface="Arial" pitchFamily="34" charset="0"/>
-                <a:ea typeface="Arial" pitchFamily="34" charset="-122"/>
-                <a:cs typeface="Arial" pitchFamily="34" charset="-120"/>
-              </a:rPr>
-              <a:t>The plastic was already weak and only needed a small push from the pump</a:t>
-            </a:r>
-            <a:endParaRPr lang="en-US" sz="1300" dirty="0"/>
-          </a:p>
-        </p:txBody>
-      </p:sp>
-      <p:sp>
-        <p:nvSpPr>
-          <p:cNvPr id="18" name="Text 16"/>
-          <p:cNvSpPr/>
-          <p:nvPr/>
-        </p:nvSpPr>
-        <p:spPr>
-          <a:xfrm>
-            <a:off x="11521440" y="6446520"/>
-            <a:ext cx="457200" cy="274320"/>
-          </a:xfrm>
-          <a:prstGeom prst="rect">
-            <a:avLst/>
-          </a:prstGeom>
-          <a:noFill/>
-          <a:ln/>
-        </p:spPr>
-        <p:txBody>
-          <a:bodyPr wrap="square" lIns="0" tIns="0" rIns="0" bIns="0" rtlCol="0" anchor="ctr"/>
-          <a:lstStyle/>
-          <a:p>
-            <a:pPr algn="r" indent="0" marL="0">
-              <a:buNone/>
-            </a:pPr>
-            <a:r>
-              <a:rPr lang="en-US" sz="1000" dirty="0">
-                <a:solidFill>
-                  <a:srgbClr val="C9B8E0"/>
-                </a:solidFill>
-                <a:latin typeface="Arial" pitchFamily="34" charset="0"/>
-                <a:ea typeface="Arial" pitchFamily="34" charset="-122"/>
-                <a:cs typeface="Arial" pitchFamily="34" charset="-120"/>
-              </a:rPr>
-              <a:t>9</a:t>
-            </a:r>
-            <a:endParaRPr lang="en-US" sz="1000" dirty="0"/>
           </a:p>
         </p:txBody>
       </p:sp>
